--- a/docs/582-511-web5/assets/documents/Web5_workflow-design-ia.pptx
+++ b/docs/582-511-web5/assets/documents/Web5_workflow-design-ia.pptx
@@ -16,9 +16,12 @@
     <p:sldId id="264" r:id="rId10"/>
     <p:sldId id="265" r:id="rId11"/>
     <p:sldId id="266" r:id="rId12"/>
+    <p:sldId id="267" r:id="rId13"/>
+    <p:sldId id="268" r:id="rId14"/>
+    <p:sldId id="269" r:id="rId15"/>
   </p:sldIdLst>
   <p:notesMasterIdLst>
-    <p:notesMasterId r:id="rId13"/>
+    <p:notesMasterId r:id="rId16"/>
   </p:notesMasterIdLst>
   <p:sldSz cx="12161520" cy="6858000"/>
   <p:notesSz cx="6858000" cy="12161520"/>
@@ -712,6 +715,270 @@
             <a:fld id="{F7021451-1387-4CA6-816F-3879F97B5CBC}" type="slidenum">
               <a:rPr lang="en-US"/>
               <a:t>11</a:t>
+            </a:fld>
+            <a:endParaRPr lang="en-US"/>
+          </a:p>
+        </p:txBody>
+      </p:sp>
+    </p:spTree>
+    <p:extLst>
+      <p:ext uri="{BB962C8B-B14F-4D97-AF65-F5344CB8AC3E}">
+        <p14:creationId xmlns:p14="http://schemas.microsoft.com/office/powerpoint/2010/main" val="1024086991"/>
+      </p:ext>
+    </p:extLst>
+  </p:cSld>
+  <p:clrMapOvr>
+    <a:masterClrMapping/>
+  </p:clrMapOvr>
+</p:notes>
+</file>
+
+<file path=ppt/notesSlides/notesSlide12.xml><?xml version="1.0" encoding="utf-8"?>
+<p:notes xmlns:a="http://schemas.openxmlformats.org/drawingml/2006/main" xmlns:r="http://schemas.openxmlformats.org/officeDocument/2006/relationships" xmlns:p="http://schemas.openxmlformats.org/presentationml/2006/main">
+  <p:cSld>
+    <p:spTree>
+      <p:nvGrpSpPr>
+        <p:cNvPr id="1" name=""/>
+        <p:cNvGrpSpPr/>
+        <p:nvPr/>
+      </p:nvGrpSpPr>
+      <p:grpSpPr>
+        <a:xfrm>
+          <a:off x="0" y="0"/>
+          <a:ext cx="0" cy="0"/>
+          <a:chOff x="0" y="0"/>
+          <a:chExt cx="0" cy="0"/>
+        </a:xfrm>
+      </p:grpSpPr>
+      <p:sp>
+        <p:nvSpPr>
+          <p:cNvPr id="2" name="Slide Image Placeholder 1"/>
+          <p:cNvSpPr>
+            <a:spLocks noGrp="1" noRot="1" noChangeAspect="1"/>
+          </p:cNvSpPr>
+          <p:nvPr>
+            <p:ph type="sldImg"/>
+          </p:nvPr>
+        </p:nvSpPr>
+        <p:spPr/>
+      </p:sp>
+      <p:sp>
+        <p:nvSpPr>
+          <p:cNvPr id="3" name="Notes Placeholder 2"/>
+          <p:cNvSpPr>
+            <a:spLocks noGrp="1"/>
+          </p:cNvSpPr>
+          <p:nvPr>
+            <p:ph type="body" idx="1"/>
+          </p:nvPr>
+        </p:nvSpPr>
+        <p:spPr/>
+        <p:txBody>
+          <a:bodyPr/>
+          <a:lstStyle/>
+          <a:p>
+            <a:r>
+              <a:rPr lang="en-US" dirty="0"/>
+              <a:t/>
+            </a:r>
+            <a:endParaRPr lang="en-US" dirty="0"/>
+          </a:p>
+        </p:txBody>
+      </p:sp>
+      <p:sp>
+        <p:nvSpPr>
+          <p:cNvPr id="4" name="Slide Number Placeholder 3"/>
+          <p:cNvSpPr>
+            <a:spLocks noGrp="1"/>
+          </p:cNvSpPr>
+          <p:nvPr>
+            <p:ph type="sldNum" sz="quarter" idx="10"/>
+          </p:nvPr>
+        </p:nvSpPr>
+        <p:spPr/>
+        <p:txBody>
+          <a:bodyPr/>
+          <a:lstStyle/>
+          <a:p>
+            <a:fld id="{F7021451-1387-4CA6-816F-3879F97B5CBC}" type="slidenum">
+              <a:rPr lang="en-US"/>
+              <a:t>12</a:t>
+            </a:fld>
+            <a:endParaRPr lang="en-US"/>
+          </a:p>
+        </p:txBody>
+      </p:sp>
+    </p:spTree>
+    <p:extLst>
+      <p:ext uri="{BB962C8B-B14F-4D97-AF65-F5344CB8AC3E}">
+        <p14:creationId xmlns:p14="http://schemas.microsoft.com/office/powerpoint/2010/main" val="1024086991"/>
+      </p:ext>
+    </p:extLst>
+  </p:cSld>
+  <p:clrMapOvr>
+    <a:masterClrMapping/>
+  </p:clrMapOvr>
+</p:notes>
+</file>
+
+<file path=ppt/notesSlides/notesSlide13.xml><?xml version="1.0" encoding="utf-8"?>
+<p:notes xmlns:a="http://schemas.openxmlformats.org/drawingml/2006/main" xmlns:r="http://schemas.openxmlformats.org/officeDocument/2006/relationships" xmlns:p="http://schemas.openxmlformats.org/presentationml/2006/main">
+  <p:cSld>
+    <p:spTree>
+      <p:nvGrpSpPr>
+        <p:cNvPr id="1" name=""/>
+        <p:cNvGrpSpPr/>
+        <p:nvPr/>
+      </p:nvGrpSpPr>
+      <p:grpSpPr>
+        <a:xfrm>
+          <a:off x="0" y="0"/>
+          <a:ext cx="0" cy="0"/>
+          <a:chOff x="0" y="0"/>
+          <a:chExt cx="0" cy="0"/>
+        </a:xfrm>
+      </p:grpSpPr>
+      <p:sp>
+        <p:nvSpPr>
+          <p:cNvPr id="2" name="Slide Image Placeholder 1"/>
+          <p:cNvSpPr>
+            <a:spLocks noGrp="1" noRot="1" noChangeAspect="1"/>
+          </p:cNvSpPr>
+          <p:nvPr>
+            <p:ph type="sldImg"/>
+          </p:nvPr>
+        </p:nvSpPr>
+        <p:spPr/>
+      </p:sp>
+      <p:sp>
+        <p:nvSpPr>
+          <p:cNvPr id="3" name="Notes Placeholder 2"/>
+          <p:cNvSpPr>
+            <a:spLocks noGrp="1"/>
+          </p:cNvSpPr>
+          <p:nvPr>
+            <p:ph type="body" idx="1"/>
+          </p:nvPr>
+        </p:nvSpPr>
+        <p:spPr/>
+        <p:txBody>
+          <a:bodyPr/>
+          <a:lstStyle/>
+          <a:p>
+            <a:r>
+              <a:rPr lang="en-US" dirty="0"/>
+              <a:t/>
+            </a:r>
+            <a:endParaRPr lang="en-US" dirty="0"/>
+          </a:p>
+        </p:txBody>
+      </p:sp>
+      <p:sp>
+        <p:nvSpPr>
+          <p:cNvPr id="4" name="Slide Number Placeholder 3"/>
+          <p:cNvSpPr>
+            <a:spLocks noGrp="1"/>
+          </p:cNvSpPr>
+          <p:nvPr>
+            <p:ph type="sldNum" sz="quarter" idx="10"/>
+          </p:nvPr>
+        </p:nvSpPr>
+        <p:spPr/>
+        <p:txBody>
+          <a:bodyPr/>
+          <a:lstStyle/>
+          <a:p>
+            <a:fld id="{F7021451-1387-4CA6-816F-3879F97B5CBC}" type="slidenum">
+              <a:rPr lang="en-US"/>
+              <a:t>13</a:t>
+            </a:fld>
+            <a:endParaRPr lang="en-US"/>
+          </a:p>
+        </p:txBody>
+      </p:sp>
+    </p:spTree>
+    <p:extLst>
+      <p:ext uri="{BB962C8B-B14F-4D97-AF65-F5344CB8AC3E}">
+        <p14:creationId xmlns:p14="http://schemas.microsoft.com/office/powerpoint/2010/main" val="1024086991"/>
+      </p:ext>
+    </p:extLst>
+  </p:cSld>
+  <p:clrMapOvr>
+    <a:masterClrMapping/>
+  </p:clrMapOvr>
+</p:notes>
+</file>
+
+<file path=ppt/notesSlides/notesSlide14.xml><?xml version="1.0" encoding="utf-8"?>
+<p:notes xmlns:a="http://schemas.openxmlformats.org/drawingml/2006/main" xmlns:r="http://schemas.openxmlformats.org/officeDocument/2006/relationships" xmlns:p="http://schemas.openxmlformats.org/presentationml/2006/main">
+  <p:cSld>
+    <p:spTree>
+      <p:nvGrpSpPr>
+        <p:cNvPr id="1" name=""/>
+        <p:cNvGrpSpPr/>
+        <p:nvPr/>
+      </p:nvGrpSpPr>
+      <p:grpSpPr>
+        <a:xfrm>
+          <a:off x="0" y="0"/>
+          <a:ext cx="0" cy="0"/>
+          <a:chOff x="0" y="0"/>
+          <a:chExt cx="0" cy="0"/>
+        </a:xfrm>
+      </p:grpSpPr>
+      <p:sp>
+        <p:nvSpPr>
+          <p:cNvPr id="2" name="Slide Image Placeholder 1"/>
+          <p:cNvSpPr>
+            <a:spLocks noGrp="1" noRot="1" noChangeAspect="1"/>
+          </p:cNvSpPr>
+          <p:nvPr>
+            <p:ph type="sldImg"/>
+          </p:nvPr>
+        </p:nvSpPr>
+        <p:spPr/>
+      </p:sp>
+      <p:sp>
+        <p:nvSpPr>
+          <p:cNvPr id="3" name="Notes Placeholder 2"/>
+          <p:cNvSpPr>
+            <a:spLocks noGrp="1"/>
+          </p:cNvSpPr>
+          <p:nvPr>
+            <p:ph type="body" idx="1"/>
+          </p:nvPr>
+        </p:nvSpPr>
+        <p:spPr/>
+        <p:txBody>
+          <a:bodyPr/>
+          <a:lstStyle/>
+          <a:p>
+            <a:r>
+              <a:rPr lang="en-US" dirty="0"/>
+              <a:t/>
+            </a:r>
+            <a:endParaRPr lang="en-US" dirty="0"/>
+          </a:p>
+        </p:txBody>
+      </p:sp>
+      <p:sp>
+        <p:nvSpPr>
+          <p:cNvPr id="4" name="Slide Number Placeholder 3"/>
+          <p:cNvSpPr>
+            <a:spLocks noGrp="1"/>
+          </p:cNvSpPr>
+          <p:nvPr>
+            <p:ph type="sldNum" sz="quarter" idx="10"/>
+          </p:nvPr>
+        </p:nvSpPr>
+        <p:spPr/>
+        <p:txBody>
+          <a:bodyPr/>
+          <a:lstStyle/>
+          <a:p>
+            <a:fld id="{F7021451-1387-4CA6-816F-3879F97B5CBC}" type="slidenum">
+              <a:rPr lang="en-US"/>
+              <a:t>14</a:t>
             </a:fld>
             <a:endParaRPr lang="en-US"/>
           </a:p>
@@ -2074,7 +2341,7 @@
                 <a:ea typeface="Poppins" pitchFamily="34" charset="-122"/>
                 <a:cs typeface="Poppins" pitchFamily="34" charset="-120"/>
               </a:rPr>
-              <a:t>   ·   AUJOURD'HUI</a:t>
+              <a:t>   ·   PENDANT LE DESIGN</a:t>
             </a:r>
             <a:endParaRPr lang="en-US" sz="1200" dirty="0"/>
           </a:p>
@@ -2127,24 +2394,24 @@
         </p:nvSpPr>
         <p:spPr>
           <a:xfrm>
-            <a:off x="548640" y="914400"/>
-            <a:ext cx="10972800" cy="731520"/>
-          </a:xfrm>
-          <a:prstGeom prst="rect">
-            <a:avLst/>
-          </a:prstGeom>
-          <a:noFill/>
-          <a:ln/>
-        </p:spPr>
-        <p:txBody>
-          <a:bodyPr wrap="square" lIns="0" tIns="0" rIns="0" bIns="0" rtlCol="0" anchor="ctr"/>
-          <a:lstStyle/>
-          <a:p>
-            <a:pPr indent="0" marL="0">
-              <a:buNone/>
-            </a:pPr>
-            <a:r>
-              <a:rPr lang="en-US" sz="3200" b="1" dirty="0">
+            <a:off x="548640" y="868680"/>
+            <a:ext cx="10972800" cy="640080"/>
+          </a:xfrm>
+          <a:prstGeom prst="rect">
+            <a:avLst/>
+          </a:prstGeom>
+          <a:noFill/>
+          <a:ln/>
+        </p:spPr>
+        <p:txBody>
+          <a:bodyPr wrap="square" lIns="0" tIns="0" rIns="0" bIns="0" rtlCol="0" anchor="ctr"/>
+          <a:lstStyle/>
+          <a:p>
+            <a:pPr indent="0" marL="0">
+              <a:buNone/>
+            </a:pPr>
+            <a:r>
+              <a:rPr lang="en-US" sz="2800" b="1" dirty="0">
                 <a:solidFill>
                   <a:srgbClr val="FFFFFF"/>
                 </a:solidFill>
@@ -2152,72 +2419,77 @@
                 <a:ea typeface="Poppins" pitchFamily="34" charset="-122"/>
                 <a:cs typeface="Poppins" pitchFamily="34" charset="-120"/>
               </a:rPr>
-              <a:t>À vous de raffiner</a:t>
-            </a:r>
-            <a:endParaRPr lang="en-US" sz="3200" dirty="0"/>
-          </a:p>
-        </p:txBody>
-      </p:sp>
-      <p:sp>
-        <p:nvSpPr>
-          <p:cNvPr id="5" name="Shape 3"/>
-          <p:cNvSpPr/>
-          <p:nvPr/>
-        </p:nvSpPr>
-        <p:spPr>
-          <a:xfrm>
-            <a:off x="548640" y="1965960"/>
-            <a:ext cx="11064240" cy="960120"/>
+              <a:t>Le vocabulaire des animations au scroll</a:t>
+            </a:r>
+            <a:endParaRPr lang="en-US" sz="2800" dirty="0"/>
+          </a:p>
+        </p:txBody>
+      </p:sp>
+      <p:sp>
+        <p:nvSpPr>
+          <p:cNvPr id="5" name="Text 3"/>
+          <p:cNvSpPr/>
+          <p:nvPr/>
+        </p:nvSpPr>
+        <p:spPr>
+          <a:xfrm>
+            <a:off x="566928" y="1463040"/>
+            <a:ext cx="10058400" cy="411480"/>
+          </a:xfrm>
+          <a:prstGeom prst="rect">
+            <a:avLst/>
+          </a:prstGeom>
+          <a:noFill/>
+          <a:ln/>
+        </p:spPr>
+        <p:txBody>
+          <a:bodyPr wrap="square" lIns="0" tIns="0" rIns="0" bIns="0" rtlCol="0" anchor="ctr"/>
+          <a:lstStyle/>
+          <a:p>
+            <a:pPr indent="0" marL="0">
+              <a:buNone/>
+            </a:pPr>
+            <a:r>
+              <a:rPr lang="en-US" sz="1500" dirty="0">
+                <a:solidFill>
+                  <a:srgbClr val="B8B8B8"/>
+                </a:solidFill>
+                <a:latin typeface="Poppins" pitchFamily="34" charset="0"/>
+                <a:ea typeface="Poppins" pitchFamily="34" charset="-122"/>
+                <a:cs typeface="Poppins" pitchFamily="34" charset="-120"/>
+              </a:rPr>
+              <a:t>Plusieurs de ces idées, vous les connaissez déjà via Anime.js en Web 3.</a:t>
+            </a:r>
+            <a:endParaRPr lang="en-US" sz="1500" dirty="0"/>
+          </a:p>
+        </p:txBody>
+      </p:sp>
+      <p:sp>
+        <p:nvSpPr>
+          <p:cNvPr id="6" name="Shape 4"/>
+          <p:cNvSpPr/>
+          <p:nvPr/>
+        </p:nvSpPr>
+        <p:spPr>
+          <a:xfrm>
+            <a:off x="548640" y="2011680"/>
+            <a:ext cx="5486400" cy="1280160"/>
           </a:xfrm>
           <a:prstGeom prst="roundRect">
             <a:avLst>
-              <a:gd name="adj" fmla="val 6667"/>
+              <a:gd name="adj" fmla="val 5000"/>
             </a:avLst>
           </a:prstGeom>
           <a:solidFill>
             <a:srgbClr val="161616"/>
           </a:solidFill>
-          <a:ln/>
-        </p:spPr>
-      </p:sp>
-      <p:sp>
-        <p:nvSpPr>
-          <p:cNvPr id="6" name="Text 4"/>
-          <p:cNvSpPr/>
-          <p:nvPr/>
-        </p:nvSpPr>
-        <p:spPr>
-          <a:xfrm>
-            <a:off x="868680" y="2103120"/>
-            <a:ext cx="2194560" cy="685800"/>
-          </a:xfrm>
-          <a:prstGeom prst="rect">
-            <a:avLst/>
-          </a:prstGeom>
-          <a:noFill/>
-          <a:ln/>
-        </p:spPr>
-        <p:txBody>
-          <a:bodyPr wrap="square" lIns="0" tIns="0" rIns="0" bIns="0" rtlCol="0" anchor="ctr"/>
-          <a:lstStyle/>
-          <a:p>
-            <a:pPr indent="0" marL="0">
-              <a:buNone/>
-            </a:pPr>
-            <a:r>
-              <a:rPr lang="en-US" sz="1800" b="1" dirty="0">
-                <a:solidFill>
-                  <a:srgbClr val="FF2B47"/>
-                </a:solidFill>
-                <a:latin typeface="Poppins" pitchFamily="34" charset="0"/>
-                <a:ea typeface="Poppins" pitchFamily="34" charset="-122"/>
-                <a:cs typeface="Poppins" pitchFamily="34" charset="-120"/>
-              </a:rPr>
-              <a:t>Raffiner</a:t>
-            </a:r>
-            <a:endParaRPr lang="en-US" sz="1800" dirty="0"/>
-          </a:p>
-        </p:txBody>
+          <a:ln w="12700">
+            <a:solidFill>
+              <a:srgbClr val="8DDBA0"/>
+            </a:solidFill>
+            <a:prstDash val="solid"/>
+          </a:ln>
+        </p:spPr>
       </p:sp>
       <p:sp>
         <p:nvSpPr>
@@ -2227,24 +2499,66 @@
         </p:nvSpPr>
         <p:spPr>
           <a:xfrm>
-            <a:off x="3200400" y="2103120"/>
-            <a:ext cx="8138160" cy="685800"/>
-          </a:xfrm>
-          <a:prstGeom prst="rect">
-            <a:avLst/>
-          </a:prstGeom>
-          <a:noFill/>
-          <a:ln/>
-        </p:spPr>
-        <p:txBody>
-          <a:bodyPr wrap="square" lIns="0" tIns="0" rIns="0" bIns="0" rtlCol="0" anchor="ctr"/>
-          <a:lstStyle/>
-          <a:p>
-            <a:pPr indent="0" marL="0">
-              <a:buNone/>
-            </a:pPr>
-            <a:r>
-              <a:rPr lang="en-US" sz="1500" dirty="0">
+            <a:off x="822960" y="2139696"/>
+            <a:ext cx="4937760" cy="365760"/>
+          </a:xfrm>
+          <a:prstGeom prst="rect">
+            <a:avLst/>
+          </a:prstGeom>
+          <a:noFill/>
+          <a:ln/>
+        </p:spPr>
+        <p:txBody>
+          <a:bodyPr wrap="square" lIns="0" tIns="0" rIns="0" bIns="0" rtlCol="0" anchor="ctr"/>
+          <a:lstStyle/>
+          <a:p>
+            <a:pPr indent="0" marL="0">
+              <a:buNone/>
+            </a:pPr>
+            <a:r>
+              <a:rPr lang="en-US" sz="1500" b="1" dirty="0">
+                <a:solidFill>
+                  <a:srgbClr val="FFFFFF"/>
+                </a:solidFill>
+                <a:latin typeface="Poppins" pitchFamily="34" charset="0"/>
+                <a:ea typeface="Poppins" pitchFamily="34" charset="-122"/>
+                <a:cs typeface="Poppins" pitchFamily="34" charset="-120"/>
+              </a:rPr>
+              <a:t>Parallax</a:t>
+            </a:r>
+            <a:endParaRPr lang="en-US" sz="1500" dirty="0"/>
+          </a:p>
+        </p:txBody>
+      </p:sp>
+      <p:sp>
+        <p:nvSpPr>
+          <p:cNvPr id="8" name="Text 6"/>
+          <p:cNvSpPr/>
+          <p:nvPr/>
+        </p:nvSpPr>
+        <p:spPr>
+          <a:xfrm>
+            <a:off x="822960" y="2505456"/>
+            <a:ext cx="4937760" cy="502920"/>
+          </a:xfrm>
+          <a:prstGeom prst="rect">
+            <a:avLst/>
+          </a:prstGeom>
+          <a:noFill/>
+          <a:ln/>
+        </p:spPr>
+        <p:txBody>
+          <a:bodyPr wrap="square" lIns="0" tIns="0" rIns="0" bIns="0" rtlCol="0" anchor="t"/>
+          <a:lstStyle/>
+          <a:p>
+            <a:pPr indent="0" marL="0">
+              <a:lnSpc>
+                <a:spcPts val="1500"/>
+              </a:lnSpc>
+              <a:buNone/>
+            </a:pPr>
+            <a:r>
+              <a:rPr lang="en-US" sz="1150" dirty="0">
                 <a:solidFill>
                   <a:srgbClr val="B8B8B8"/>
                 </a:solidFill>
@@ -2252,99 +2566,146 @@
                 <a:ea typeface="Poppins" pitchFamily="34" charset="-122"/>
                 <a:cs typeface="Poppins" pitchFamily="34" charset="-120"/>
               </a:rPr>
-              <a:t>maquettes mobile et desktop, à partir de vos directions retenues</a:t>
-            </a:r>
-            <a:endParaRPr lang="en-US" sz="1500" dirty="0"/>
-          </a:p>
-        </p:txBody>
-      </p:sp>
-      <p:sp>
-        <p:nvSpPr>
-          <p:cNvPr id="8" name="Shape 6"/>
-          <p:cNvSpPr/>
-          <p:nvPr/>
-        </p:nvSpPr>
-        <p:spPr>
-          <a:xfrm>
-            <a:off x="548640" y="3063240"/>
-            <a:ext cx="11064240" cy="960120"/>
+              <a:t>L'arrière-plan bouge plus lentement que le premier plan.</a:t>
+            </a:r>
+            <a:endParaRPr lang="en-US" sz="1150" dirty="0"/>
+          </a:p>
+        </p:txBody>
+      </p:sp>
+      <p:sp>
+        <p:nvSpPr>
+          <p:cNvPr id="9" name="Text 7"/>
+          <p:cNvSpPr/>
+          <p:nvPr/>
+        </p:nvSpPr>
+        <p:spPr>
+          <a:xfrm>
+            <a:off x="822960" y="2999232"/>
+            <a:ext cx="4937760" cy="256032"/>
+          </a:xfrm>
+          <a:prstGeom prst="rect">
+            <a:avLst/>
+          </a:prstGeom>
+          <a:noFill/>
+          <a:ln/>
+        </p:spPr>
+        <p:txBody>
+          <a:bodyPr wrap="square" lIns="0" tIns="0" rIns="0" bIns="0" rtlCol="0" anchor="ctr"/>
+          <a:lstStyle/>
+          <a:p>
+            <a:pPr indent="0" marL="0">
+              <a:buNone/>
+            </a:pPr>
+            <a:r>
+              <a:rPr lang="en-US" sz="950" b="1" spc="100" kern="0" dirty="0">
+                <a:solidFill>
+                  <a:srgbClr val="8DDBA0"/>
+                </a:solidFill>
+                <a:latin typeface="Poppins" pitchFamily="34" charset="0"/>
+                <a:ea typeface="Poppins" pitchFamily="34" charset="-122"/>
+                <a:cs typeface="Poppins" pitchFamily="34" charset="-120"/>
+              </a:rPr>
+              <a:t>CONNU · vu avec Anime.js</a:t>
+            </a:r>
+            <a:endParaRPr lang="en-US" sz="950" dirty="0"/>
+          </a:p>
+        </p:txBody>
+      </p:sp>
+      <p:sp>
+        <p:nvSpPr>
+          <p:cNvPr id="10" name="Shape 8"/>
+          <p:cNvSpPr/>
+          <p:nvPr/>
+        </p:nvSpPr>
+        <p:spPr>
+          <a:xfrm>
+            <a:off x="6172200" y="2011680"/>
+            <a:ext cx="5486400" cy="1280160"/>
           </a:xfrm>
           <a:prstGeom prst="roundRect">
             <a:avLst>
-              <a:gd name="adj" fmla="val 6667"/>
+              <a:gd name="adj" fmla="val 5000"/>
             </a:avLst>
           </a:prstGeom>
           <a:solidFill>
             <a:srgbClr val="161616"/>
           </a:solidFill>
-          <a:ln/>
-        </p:spPr>
-      </p:sp>
-      <p:sp>
-        <p:nvSpPr>
-          <p:cNvPr id="9" name="Text 7"/>
-          <p:cNvSpPr/>
-          <p:nvPr/>
-        </p:nvSpPr>
-        <p:spPr>
-          <a:xfrm>
-            <a:off x="868680" y="3200400"/>
-            <a:ext cx="2194560" cy="685800"/>
-          </a:xfrm>
-          <a:prstGeom prst="rect">
-            <a:avLst/>
-          </a:prstGeom>
-          <a:noFill/>
-          <a:ln/>
-        </p:spPr>
-        <p:txBody>
-          <a:bodyPr wrap="square" lIns="0" tIns="0" rIns="0" bIns="0" rtlCol="0" anchor="ctr"/>
-          <a:lstStyle/>
-          <a:p>
-            <a:pPr indent="0" marL="0">
-              <a:buNone/>
-            </a:pPr>
-            <a:r>
-              <a:rPr lang="en-US" sz="1800" b="1" dirty="0">
-                <a:solidFill>
-                  <a:srgbClr val="FF2B47"/>
-                </a:solidFill>
-                <a:latin typeface="Poppins" pitchFamily="34" charset="0"/>
-                <a:ea typeface="Poppins" pitchFamily="34" charset="-122"/>
-                <a:cs typeface="Poppins" pitchFamily="34" charset="-120"/>
-              </a:rPr>
-              <a:t>Filtrer</a:t>
-            </a:r>
-            <a:endParaRPr lang="en-US" sz="1800" dirty="0"/>
-          </a:p>
-        </p:txBody>
-      </p:sp>
-      <p:sp>
-        <p:nvSpPr>
-          <p:cNvPr id="10" name="Text 8"/>
-          <p:cNvSpPr/>
-          <p:nvPr/>
-        </p:nvSpPr>
-        <p:spPr>
-          <a:xfrm>
-            <a:off x="3200400" y="3200400"/>
-            <a:ext cx="8138160" cy="685800"/>
-          </a:xfrm>
-          <a:prstGeom prst="rect">
-            <a:avLst/>
-          </a:prstGeom>
-          <a:noFill/>
-          <a:ln/>
-        </p:spPr>
-        <p:txBody>
-          <a:bodyPr wrap="square" lIns="0" tIns="0" rIns="0" bIns="0" rtlCol="0" anchor="ctr"/>
-          <a:lstStyle/>
-          <a:p>
-            <a:pPr indent="0" marL="0">
-              <a:buNone/>
-            </a:pPr>
-            <a:r>
-              <a:rPr lang="en-US" sz="1500" dirty="0">
+          <a:ln w="12700">
+            <a:solidFill>
+              <a:srgbClr val="8DDBA0"/>
+            </a:solidFill>
+            <a:prstDash val="solid"/>
+          </a:ln>
+        </p:spPr>
+      </p:sp>
+      <p:sp>
+        <p:nvSpPr>
+          <p:cNvPr id="11" name="Text 9"/>
+          <p:cNvSpPr/>
+          <p:nvPr/>
+        </p:nvSpPr>
+        <p:spPr>
+          <a:xfrm>
+            <a:off x="6446520" y="2139696"/>
+            <a:ext cx="4937760" cy="365760"/>
+          </a:xfrm>
+          <a:prstGeom prst="rect">
+            <a:avLst/>
+          </a:prstGeom>
+          <a:noFill/>
+          <a:ln/>
+        </p:spPr>
+        <p:txBody>
+          <a:bodyPr wrap="square" lIns="0" tIns="0" rIns="0" bIns="0" rtlCol="0" anchor="ctr"/>
+          <a:lstStyle/>
+          <a:p>
+            <a:pPr indent="0" marL="0">
+              <a:buNone/>
+            </a:pPr>
+            <a:r>
+              <a:rPr lang="en-US" sz="1500" b="1" dirty="0">
+                <a:solidFill>
+                  <a:srgbClr val="FFFFFF"/>
+                </a:solidFill>
+                <a:latin typeface="Poppins" pitchFamily="34" charset="0"/>
+                <a:ea typeface="Poppins" pitchFamily="34" charset="-122"/>
+                <a:cs typeface="Poppins" pitchFamily="34" charset="-120"/>
+              </a:rPr>
+              <a:t>Révélation au scroll</a:t>
+            </a:r>
+            <a:endParaRPr lang="en-US" sz="1500" dirty="0"/>
+          </a:p>
+        </p:txBody>
+      </p:sp>
+      <p:sp>
+        <p:nvSpPr>
+          <p:cNvPr id="12" name="Text 10"/>
+          <p:cNvSpPr/>
+          <p:nvPr/>
+        </p:nvSpPr>
+        <p:spPr>
+          <a:xfrm>
+            <a:off x="6446520" y="2505456"/>
+            <a:ext cx="4937760" cy="502920"/>
+          </a:xfrm>
+          <a:prstGeom prst="rect">
+            <a:avLst/>
+          </a:prstGeom>
+          <a:noFill/>
+          <a:ln/>
+        </p:spPr>
+        <p:txBody>
+          <a:bodyPr wrap="square" lIns="0" tIns="0" rIns="0" bIns="0" rtlCol="0" anchor="t"/>
+          <a:lstStyle/>
+          <a:p>
+            <a:pPr indent="0" marL="0">
+              <a:lnSpc>
+                <a:spcPts val="1500"/>
+              </a:lnSpc>
+              <a:buNone/>
+            </a:pPr>
+            <a:r>
+              <a:rPr lang="en-US" sz="1150" dirty="0">
                 <a:solidFill>
                   <a:srgbClr val="B8B8B8"/>
                 </a:solidFill>
@@ -2352,99 +2713,146 @@
                 <a:ea typeface="Poppins" pitchFamily="34" charset="-122"/>
                 <a:cs typeface="Poppins" pitchFamily="34" charset="-120"/>
               </a:rPr>
-              <a:t>persona, accessibilité, et maintenant : justifiable et distinctif</a:t>
-            </a:r>
-            <a:endParaRPr lang="en-US" sz="1500" dirty="0"/>
-          </a:p>
-        </p:txBody>
-      </p:sp>
-      <p:sp>
-        <p:nvSpPr>
-          <p:cNvPr id="11" name="Shape 9"/>
-          <p:cNvSpPr/>
-          <p:nvPr/>
-        </p:nvSpPr>
-        <p:spPr>
-          <a:xfrm>
-            <a:off x="548640" y="4160520"/>
-            <a:ext cx="11064240" cy="960120"/>
+              <a:t>Un élément apparaît en fondu et monte légèrement à l'écran.</a:t>
+            </a:r>
+            <a:endParaRPr lang="en-US" sz="1150" dirty="0"/>
+          </a:p>
+        </p:txBody>
+      </p:sp>
+      <p:sp>
+        <p:nvSpPr>
+          <p:cNvPr id="13" name="Text 11"/>
+          <p:cNvSpPr/>
+          <p:nvPr/>
+        </p:nvSpPr>
+        <p:spPr>
+          <a:xfrm>
+            <a:off x="6446520" y="2999232"/>
+            <a:ext cx="4937760" cy="256032"/>
+          </a:xfrm>
+          <a:prstGeom prst="rect">
+            <a:avLst/>
+          </a:prstGeom>
+          <a:noFill/>
+          <a:ln/>
+        </p:spPr>
+        <p:txBody>
+          <a:bodyPr wrap="square" lIns="0" tIns="0" rIns="0" bIns="0" rtlCol="0" anchor="ctr"/>
+          <a:lstStyle/>
+          <a:p>
+            <a:pPr indent="0" marL="0">
+              <a:buNone/>
+            </a:pPr>
+            <a:r>
+              <a:rPr lang="en-US" sz="950" b="1" spc="100" kern="0" dirty="0">
+                <a:solidFill>
+                  <a:srgbClr val="8DDBA0"/>
+                </a:solidFill>
+                <a:latin typeface="Poppins" pitchFamily="34" charset="0"/>
+                <a:ea typeface="Poppins" pitchFamily="34" charset="-122"/>
+                <a:cs typeface="Poppins" pitchFamily="34" charset="-120"/>
+              </a:rPr>
+              <a:t>CONNU · comme un .from() Anime.js</a:t>
+            </a:r>
+            <a:endParaRPr lang="en-US" sz="950" dirty="0"/>
+          </a:p>
+        </p:txBody>
+      </p:sp>
+      <p:sp>
+        <p:nvSpPr>
+          <p:cNvPr id="14" name="Shape 12"/>
+          <p:cNvSpPr/>
+          <p:nvPr/>
+        </p:nvSpPr>
+        <p:spPr>
+          <a:xfrm>
+            <a:off x="548640" y="3429000"/>
+            <a:ext cx="5486400" cy="1280160"/>
           </a:xfrm>
           <a:prstGeom prst="roundRect">
             <a:avLst>
-              <a:gd name="adj" fmla="val 6667"/>
+              <a:gd name="adj" fmla="val 5000"/>
             </a:avLst>
           </a:prstGeom>
           <a:solidFill>
             <a:srgbClr val="161616"/>
           </a:solidFill>
-          <a:ln/>
-        </p:spPr>
-      </p:sp>
-      <p:sp>
-        <p:nvSpPr>
-          <p:cNvPr id="12" name="Text 10"/>
-          <p:cNvSpPr/>
-          <p:nvPr/>
-        </p:nvSpPr>
-        <p:spPr>
-          <a:xfrm>
-            <a:off x="868680" y="4297680"/>
-            <a:ext cx="2194560" cy="685800"/>
-          </a:xfrm>
-          <a:prstGeom prst="rect">
-            <a:avLst/>
-          </a:prstGeom>
-          <a:noFill/>
-          <a:ln/>
-        </p:spPr>
-        <p:txBody>
-          <a:bodyPr wrap="square" lIns="0" tIns="0" rIns="0" bIns="0" rtlCol="0" anchor="ctr"/>
-          <a:lstStyle/>
-          <a:p>
-            <a:pPr indent="0" marL="0">
-              <a:buNone/>
-            </a:pPr>
-            <a:r>
-              <a:rPr lang="en-US" sz="1800" b="1" dirty="0">
-                <a:solidFill>
-                  <a:srgbClr val="FF2B47"/>
-                </a:solidFill>
-                <a:latin typeface="Poppins" pitchFamily="34" charset="0"/>
-                <a:ea typeface="Poppins" pitchFamily="34" charset="-122"/>
-                <a:cs typeface="Poppins" pitchFamily="34" charset="-120"/>
-              </a:rPr>
-              <a:t>Assister</a:t>
-            </a:r>
-            <a:endParaRPr lang="en-US" sz="1800" dirty="0"/>
-          </a:p>
-        </p:txBody>
-      </p:sp>
-      <p:sp>
-        <p:nvSpPr>
-          <p:cNvPr id="13" name="Text 11"/>
-          <p:cNvSpPr/>
-          <p:nvPr/>
-        </p:nvSpPr>
-        <p:spPr>
-          <a:xfrm>
-            <a:off x="3200400" y="4297680"/>
-            <a:ext cx="8138160" cy="685800"/>
-          </a:xfrm>
-          <a:prstGeom prst="rect">
-            <a:avLst/>
-          </a:prstGeom>
-          <a:noFill/>
-          <a:ln/>
-        </p:spPr>
-        <p:txBody>
-          <a:bodyPr wrap="square" lIns="0" tIns="0" rIns="0" bIns="0" rtlCol="0" anchor="ctr"/>
-          <a:lstStyle/>
-          <a:p>
-            <a:pPr indent="0" marL="0">
-              <a:buNone/>
-            </a:pPr>
-            <a:r>
-              <a:rPr lang="en-US" sz="1500" dirty="0">
+          <a:ln w="12700">
+            <a:solidFill>
+              <a:srgbClr val="8DDBA0"/>
+            </a:solidFill>
+            <a:prstDash val="solid"/>
+          </a:ln>
+        </p:spPr>
+      </p:sp>
+      <p:sp>
+        <p:nvSpPr>
+          <p:cNvPr id="15" name="Text 13"/>
+          <p:cNvSpPr/>
+          <p:nvPr/>
+        </p:nvSpPr>
+        <p:spPr>
+          <a:xfrm>
+            <a:off x="822960" y="3557016"/>
+            <a:ext cx="4937760" cy="365760"/>
+          </a:xfrm>
+          <a:prstGeom prst="rect">
+            <a:avLst/>
+          </a:prstGeom>
+          <a:noFill/>
+          <a:ln/>
+        </p:spPr>
+        <p:txBody>
+          <a:bodyPr wrap="square" lIns="0" tIns="0" rIns="0" bIns="0" rtlCol="0" anchor="ctr"/>
+          <a:lstStyle/>
+          <a:p>
+            <a:pPr indent="0" marL="0">
+              <a:buNone/>
+            </a:pPr>
+            <a:r>
+              <a:rPr lang="en-US" sz="1500" b="1" dirty="0">
+                <a:solidFill>
+                  <a:srgbClr val="FFFFFF"/>
+                </a:solidFill>
+                <a:latin typeface="Poppins" pitchFamily="34" charset="0"/>
+                <a:ea typeface="Poppins" pitchFamily="34" charset="-122"/>
+                <a:cs typeface="Poppins" pitchFamily="34" charset="-120"/>
+              </a:rPr>
+              <a:t>Cascade (stagger)</a:t>
+            </a:r>
+            <a:endParaRPr lang="en-US" sz="1500" dirty="0"/>
+          </a:p>
+        </p:txBody>
+      </p:sp>
+      <p:sp>
+        <p:nvSpPr>
+          <p:cNvPr id="16" name="Text 14"/>
+          <p:cNvSpPr/>
+          <p:nvPr/>
+        </p:nvSpPr>
+        <p:spPr>
+          <a:xfrm>
+            <a:off x="822960" y="3922776"/>
+            <a:ext cx="4937760" cy="502920"/>
+          </a:xfrm>
+          <a:prstGeom prst="rect">
+            <a:avLst/>
+          </a:prstGeom>
+          <a:noFill/>
+          <a:ln/>
+        </p:spPr>
+        <p:txBody>
+          <a:bodyPr wrap="square" lIns="0" tIns="0" rIns="0" bIns="0" rtlCol="0" anchor="t"/>
+          <a:lstStyle/>
+          <a:p>
+            <a:pPr indent="0" marL="0">
+              <a:lnSpc>
+                <a:spcPts val="1500"/>
+              </a:lnSpc>
+              <a:buNone/>
+            </a:pPr>
+            <a:r>
+              <a:rPr lang="en-US" sz="1150" dirty="0">
                 <a:solidFill>
                   <a:srgbClr val="B8B8B8"/>
                 </a:solidFill>
@@ -2452,99 +2860,146 @@
                 <a:ea typeface="Poppins" pitchFamily="34" charset="-122"/>
                 <a:cs typeface="Poppins" pitchFamily="34" charset="-120"/>
               </a:rPr>
-              <a:t>auto-layout, contenu, images, vectorisation (assistants IA gratuits de Figma)</a:t>
-            </a:r>
-            <a:endParaRPr lang="en-US" sz="1500" dirty="0"/>
-          </a:p>
-        </p:txBody>
-      </p:sp>
-      <p:sp>
-        <p:nvSpPr>
-          <p:cNvPr id="14" name="Shape 12"/>
-          <p:cNvSpPr/>
-          <p:nvPr/>
-        </p:nvSpPr>
-        <p:spPr>
-          <a:xfrm>
-            <a:off x="548640" y="5257800"/>
-            <a:ext cx="11064240" cy="960120"/>
+              <a:t>Plusieurs éléments apparaissent l'un après l'autre, léger délai.</a:t>
+            </a:r>
+            <a:endParaRPr lang="en-US" sz="1150" dirty="0"/>
+          </a:p>
+        </p:txBody>
+      </p:sp>
+      <p:sp>
+        <p:nvSpPr>
+          <p:cNvPr id="17" name="Text 15"/>
+          <p:cNvSpPr/>
+          <p:nvPr/>
+        </p:nvSpPr>
+        <p:spPr>
+          <a:xfrm>
+            <a:off x="822960" y="4416552"/>
+            <a:ext cx="4937760" cy="256032"/>
+          </a:xfrm>
+          <a:prstGeom prst="rect">
+            <a:avLst/>
+          </a:prstGeom>
+          <a:noFill/>
+          <a:ln/>
+        </p:spPr>
+        <p:txBody>
+          <a:bodyPr wrap="square" lIns="0" tIns="0" rIns="0" bIns="0" rtlCol="0" anchor="ctr"/>
+          <a:lstStyle/>
+          <a:p>
+            <a:pPr indent="0" marL="0">
+              <a:buNone/>
+            </a:pPr>
+            <a:r>
+              <a:rPr lang="en-US" sz="950" b="1" spc="100" kern="0" dirty="0">
+                <a:solidFill>
+                  <a:srgbClr val="8DDBA0"/>
+                </a:solidFill>
+                <a:latin typeface="Poppins" pitchFamily="34" charset="0"/>
+                <a:ea typeface="Poppins" pitchFamily="34" charset="-122"/>
+                <a:cs typeface="Poppins" pitchFamily="34" charset="-120"/>
+              </a:rPr>
+              <a:t>CONNU · stagger() Anime.js</a:t>
+            </a:r>
+            <a:endParaRPr lang="en-US" sz="950" dirty="0"/>
+          </a:p>
+        </p:txBody>
+      </p:sp>
+      <p:sp>
+        <p:nvSpPr>
+          <p:cNvPr id="18" name="Shape 16"/>
+          <p:cNvSpPr/>
+          <p:nvPr/>
+        </p:nvSpPr>
+        <p:spPr>
+          <a:xfrm>
+            <a:off x="6172200" y="3429000"/>
+            <a:ext cx="5486400" cy="1280160"/>
           </a:xfrm>
           <a:prstGeom prst="roundRect">
             <a:avLst>
-              <a:gd name="adj" fmla="val 6667"/>
+              <a:gd name="adj" fmla="val 5000"/>
             </a:avLst>
           </a:prstGeom>
           <a:solidFill>
             <a:srgbClr val="161616"/>
           </a:solidFill>
-          <a:ln/>
-        </p:spPr>
-      </p:sp>
-      <p:sp>
-        <p:nvSpPr>
-          <p:cNvPr id="15" name="Text 13"/>
-          <p:cNvSpPr/>
-          <p:nvPr/>
-        </p:nvSpPr>
-        <p:spPr>
-          <a:xfrm>
-            <a:off x="868680" y="5394960"/>
-            <a:ext cx="2194560" cy="685800"/>
-          </a:xfrm>
-          <a:prstGeom prst="rect">
-            <a:avLst/>
-          </a:prstGeom>
-          <a:noFill/>
-          <a:ln/>
-        </p:spPr>
-        <p:txBody>
-          <a:bodyPr wrap="square" lIns="0" tIns="0" rIns="0" bIns="0" rtlCol="0" anchor="ctr"/>
-          <a:lstStyle/>
-          <a:p>
-            <a:pPr indent="0" marL="0">
-              <a:buNone/>
-            </a:pPr>
-            <a:r>
-              <a:rPr lang="en-US" sz="1800" b="1" dirty="0">
-                <a:solidFill>
-                  <a:srgbClr val="FF2B47"/>
-                </a:solidFill>
-                <a:latin typeface="Poppins" pitchFamily="34" charset="0"/>
-                <a:ea typeface="Poppins" pitchFamily="34" charset="-122"/>
-                <a:cs typeface="Poppins" pitchFamily="34" charset="-120"/>
-              </a:rPr>
-              <a:t>Documenter</a:t>
-            </a:r>
-            <a:endParaRPr lang="en-US" sz="1800" dirty="0"/>
-          </a:p>
-        </p:txBody>
-      </p:sp>
-      <p:sp>
-        <p:nvSpPr>
-          <p:cNvPr id="16" name="Text 14"/>
-          <p:cNvSpPr/>
-          <p:nvPr/>
-        </p:nvSpPr>
-        <p:spPr>
-          <a:xfrm>
-            <a:off x="3200400" y="5394960"/>
-            <a:ext cx="8138160" cy="685800"/>
-          </a:xfrm>
-          <a:prstGeom prst="rect">
-            <a:avLst/>
-          </a:prstGeom>
-          <a:noFill/>
-          <a:ln/>
-        </p:spPr>
-        <p:txBody>
-          <a:bodyPr wrap="square" lIns="0" tIns="0" rIns="0" bIns="0" rtlCol="0" anchor="ctr"/>
-          <a:lstStyle/>
-          <a:p>
-            <a:pPr indent="0" marL="0">
-              <a:buNone/>
-            </a:pPr>
-            <a:r>
-              <a:rPr lang="en-US" sz="1500" dirty="0">
+          <a:ln w="12700">
+            <a:solidFill>
+              <a:srgbClr val="1F1F1F"/>
+            </a:solidFill>
+            <a:prstDash val="solid"/>
+          </a:ln>
+        </p:spPr>
+      </p:sp>
+      <p:sp>
+        <p:nvSpPr>
+          <p:cNvPr id="19" name="Text 17"/>
+          <p:cNvSpPr/>
+          <p:nvPr/>
+        </p:nvSpPr>
+        <p:spPr>
+          <a:xfrm>
+            <a:off x="6446520" y="3557016"/>
+            <a:ext cx="4937760" cy="365760"/>
+          </a:xfrm>
+          <a:prstGeom prst="rect">
+            <a:avLst/>
+          </a:prstGeom>
+          <a:noFill/>
+          <a:ln/>
+        </p:spPr>
+        <p:txBody>
+          <a:bodyPr wrap="square" lIns="0" tIns="0" rIns="0" bIns="0" rtlCol="0" anchor="ctr"/>
+          <a:lstStyle/>
+          <a:p>
+            <a:pPr indent="0" marL="0">
+              <a:buNone/>
+            </a:pPr>
+            <a:r>
+              <a:rPr lang="en-US" sz="1500" b="1" dirty="0">
+                <a:solidFill>
+                  <a:srgbClr val="FFFFFF"/>
+                </a:solidFill>
+                <a:latin typeface="Poppins" pitchFamily="34" charset="0"/>
+                <a:ea typeface="Poppins" pitchFamily="34" charset="-122"/>
+                <a:cs typeface="Poppins" pitchFamily="34" charset="-120"/>
+              </a:rPr>
+              <a:t>Épinglage (pinning)</a:t>
+            </a:r>
+            <a:endParaRPr lang="en-US" sz="1500" dirty="0"/>
+          </a:p>
+        </p:txBody>
+      </p:sp>
+      <p:sp>
+        <p:nvSpPr>
+          <p:cNvPr id="20" name="Text 18"/>
+          <p:cNvSpPr/>
+          <p:nvPr/>
+        </p:nvSpPr>
+        <p:spPr>
+          <a:xfrm>
+            <a:off x="6446520" y="3922776"/>
+            <a:ext cx="4937760" cy="502920"/>
+          </a:xfrm>
+          <a:prstGeom prst="rect">
+            <a:avLst/>
+          </a:prstGeom>
+          <a:noFill/>
+          <a:ln/>
+        </p:spPr>
+        <p:txBody>
+          <a:bodyPr wrap="square" lIns="0" tIns="0" rIns="0" bIns="0" rtlCol="0" anchor="t"/>
+          <a:lstStyle/>
+          <a:p>
+            <a:pPr indent="0" marL="0">
+              <a:lnSpc>
+                <a:spcPts val="1500"/>
+              </a:lnSpc>
+              <a:buNone/>
+            </a:pPr>
+            <a:r>
+              <a:rPr lang="en-US" sz="1150" dirty="0">
                 <a:solidFill>
                   <a:srgbClr val="B8B8B8"/>
                 </a:solidFill>
@@ -2552,9 +3007,342 @@
                 <a:ea typeface="Poppins" pitchFamily="34" charset="-122"/>
                 <a:cs typeface="Poppins" pitchFamily="34" charset="-120"/>
               </a:rPr>
-              <a:t>chaque changement substantiel dans JOURNAL.md</a:t>
+              <a:t>Une section reste fixe pendant que le contenu progresse.</a:t>
+            </a:r>
+            <a:endParaRPr lang="en-US" sz="1150" dirty="0"/>
+          </a:p>
+        </p:txBody>
+      </p:sp>
+      <p:sp>
+        <p:nvSpPr>
+          <p:cNvPr id="21" name="Text 19"/>
+          <p:cNvSpPr/>
+          <p:nvPr/>
+        </p:nvSpPr>
+        <p:spPr>
+          <a:xfrm>
+            <a:off x="6446520" y="4416552"/>
+            <a:ext cx="4937760" cy="256032"/>
+          </a:xfrm>
+          <a:prstGeom prst="rect">
+            <a:avLst/>
+          </a:prstGeom>
+          <a:noFill/>
+          <a:ln/>
+        </p:spPr>
+        <p:txBody>
+          <a:bodyPr wrap="square" lIns="0" tIns="0" rIns="0" bIns="0" rtlCol="0" anchor="ctr"/>
+          <a:lstStyle/>
+          <a:p>
+            <a:pPr indent="0" marL="0">
+              <a:buNone/>
+            </a:pPr>
+            <a:r>
+              <a:rPr lang="en-US" sz="950" b="1" spc="100" kern="0" dirty="0">
+                <a:solidFill>
+                  <a:srgbClr val="6A6A6A"/>
+                </a:solidFill>
+                <a:latin typeface="Poppins" pitchFamily="34" charset="0"/>
+                <a:ea typeface="Poppins" pitchFamily="34" charset="-122"/>
+                <a:cs typeface="Poppins" pitchFamily="34" charset="-120"/>
+              </a:rPr>
+              <a:t>NOUVEAU</a:t>
+            </a:r>
+            <a:endParaRPr lang="en-US" sz="950" dirty="0"/>
+          </a:p>
+        </p:txBody>
+      </p:sp>
+      <p:sp>
+        <p:nvSpPr>
+          <p:cNvPr id="22" name="Shape 20"/>
+          <p:cNvSpPr/>
+          <p:nvPr/>
+        </p:nvSpPr>
+        <p:spPr>
+          <a:xfrm>
+            <a:off x="548640" y="4846320"/>
+            <a:ext cx="5486400" cy="1280160"/>
+          </a:xfrm>
+          <a:prstGeom prst="roundRect">
+            <a:avLst>
+              <a:gd name="adj" fmla="val 5000"/>
+            </a:avLst>
+          </a:prstGeom>
+          <a:solidFill>
+            <a:srgbClr val="161616"/>
+          </a:solidFill>
+          <a:ln w="12700">
+            <a:solidFill>
+              <a:srgbClr val="1F1F1F"/>
+            </a:solidFill>
+            <a:prstDash val="solid"/>
+          </a:ln>
+        </p:spPr>
+      </p:sp>
+      <p:sp>
+        <p:nvSpPr>
+          <p:cNvPr id="23" name="Text 21"/>
+          <p:cNvSpPr/>
+          <p:nvPr/>
+        </p:nvSpPr>
+        <p:spPr>
+          <a:xfrm>
+            <a:off x="822960" y="4974336"/>
+            <a:ext cx="4937760" cy="365760"/>
+          </a:xfrm>
+          <a:prstGeom prst="rect">
+            <a:avLst/>
+          </a:prstGeom>
+          <a:noFill/>
+          <a:ln/>
+        </p:spPr>
+        <p:txBody>
+          <a:bodyPr wrap="square" lIns="0" tIns="0" rIns="0" bIns="0" rtlCol="0" anchor="ctr"/>
+          <a:lstStyle/>
+          <a:p>
+            <a:pPr indent="0" marL="0">
+              <a:buNone/>
+            </a:pPr>
+            <a:r>
+              <a:rPr lang="en-US" sz="1500" b="1" dirty="0">
+                <a:solidFill>
+                  <a:srgbClr val="FFFFFF"/>
+                </a:solidFill>
+                <a:latin typeface="Poppins" pitchFamily="34" charset="0"/>
+                <a:ea typeface="Poppins" pitchFamily="34" charset="-122"/>
+                <a:cs typeface="Poppins" pitchFamily="34" charset="-120"/>
+              </a:rPr>
+              <a:t>Texte révélé</a:t>
             </a:r>
             <a:endParaRPr lang="en-US" sz="1500" dirty="0"/>
+          </a:p>
+        </p:txBody>
+      </p:sp>
+      <p:sp>
+        <p:nvSpPr>
+          <p:cNvPr id="24" name="Text 22"/>
+          <p:cNvSpPr/>
+          <p:nvPr/>
+        </p:nvSpPr>
+        <p:spPr>
+          <a:xfrm>
+            <a:off x="822960" y="5340096"/>
+            <a:ext cx="4937760" cy="502920"/>
+          </a:xfrm>
+          <a:prstGeom prst="rect">
+            <a:avLst/>
+          </a:prstGeom>
+          <a:noFill/>
+          <a:ln/>
+        </p:spPr>
+        <p:txBody>
+          <a:bodyPr wrap="square" lIns="0" tIns="0" rIns="0" bIns="0" rtlCol="0" anchor="t"/>
+          <a:lstStyle/>
+          <a:p>
+            <a:pPr indent="0" marL="0">
+              <a:lnSpc>
+                <a:spcPts val="1500"/>
+              </a:lnSpc>
+              <a:buNone/>
+            </a:pPr>
+            <a:r>
+              <a:rPr lang="en-US" sz="1150" dirty="0">
+                <a:solidFill>
+                  <a:srgbClr val="B8B8B8"/>
+                </a:solidFill>
+                <a:latin typeface="Poppins" pitchFamily="34" charset="0"/>
+                <a:ea typeface="Poppins" pitchFamily="34" charset="-122"/>
+                <a:cs typeface="Poppins" pitchFamily="34" charset="-120"/>
+              </a:rPr>
+              <a:t>Mots ou lignes qui apparaissent un à un.</a:t>
+            </a:r>
+            <a:endParaRPr lang="en-US" sz="1150" dirty="0"/>
+          </a:p>
+        </p:txBody>
+      </p:sp>
+      <p:sp>
+        <p:nvSpPr>
+          <p:cNvPr id="25" name="Text 23"/>
+          <p:cNvSpPr/>
+          <p:nvPr/>
+        </p:nvSpPr>
+        <p:spPr>
+          <a:xfrm>
+            <a:off x="822960" y="5833872"/>
+            <a:ext cx="4937760" cy="256032"/>
+          </a:xfrm>
+          <a:prstGeom prst="rect">
+            <a:avLst/>
+          </a:prstGeom>
+          <a:noFill/>
+          <a:ln/>
+        </p:spPr>
+        <p:txBody>
+          <a:bodyPr wrap="square" lIns="0" tIns="0" rIns="0" bIns="0" rtlCol="0" anchor="ctr"/>
+          <a:lstStyle/>
+          <a:p>
+            <a:pPr indent="0" marL="0">
+              <a:buNone/>
+            </a:pPr>
+            <a:r>
+              <a:rPr lang="en-US" sz="950" b="1" spc="100" kern="0" dirty="0">
+                <a:solidFill>
+                  <a:srgbClr val="6A6A6A"/>
+                </a:solidFill>
+                <a:latin typeface="Poppins" pitchFamily="34" charset="0"/>
+                <a:ea typeface="Poppins" pitchFamily="34" charset="-122"/>
+                <a:cs typeface="Poppins" pitchFamily="34" charset="-120"/>
+              </a:rPr>
+              <a:t>NOUVEAU</a:t>
+            </a:r>
+            <a:endParaRPr lang="en-US" sz="950" dirty="0"/>
+          </a:p>
+        </p:txBody>
+      </p:sp>
+      <p:sp>
+        <p:nvSpPr>
+          <p:cNvPr id="26" name="Shape 24"/>
+          <p:cNvSpPr/>
+          <p:nvPr/>
+        </p:nvSpPr>
+        <p:spPr>
+          <a:xfrm>
+            <a:off x="6172200" y="4846320"/>
+            <a:ext cx="5486400" cy="1280160"/>
+          </a:xfrm>
+          <a:prstGeom prst="roundRect">
+            <a:avLst>
+              <a:gd name="adj" fmla="val 5000"/>
+            </a:avLst>
+          </a:prstGeom>
+          <a:solidFill>
+            <a:srgbClr val="161616"/>
+          </a:solidFill>
+          <a:ln w="12700">
+            <a:solidFill>
+              <a:srgbClr val="1F1F1F"/>
+            </a:solidFill>
+            <a:prstDash val="solid"/>
+          </a:ln>
+        </p:spPr>
+      </p:sp>
+      <p:sp>
+        <p:nvSpPr>
+          <p:cNvPr id="27" name="Text 25"/>
+          <p:cNvSpPr/>
+          <p:nvPr/>
+        </p:nvSpPr>
+        <p:spPr>
+          <a:xfrm>
+            <a:off x="6446520" y="4974336"/>
+            <a:ext cx="4937760" cy="365760"/>
+          </a:xfrm>
+          <a:prstGeom prst="rect">
+            <a:avLst/>
+          </a:prstGeom>
+          <a:noFill/>
+          <a:ln/>
+        </p:spPr>
+        <p:txBody>
+          <a:bodyPr wrap="square" lIns="0" tIns="0" rIns="0" bIns="0" rtlCol="0" anchor="ctr"/>
+          <a:lstStyle/>
+          <a:p>
+            <a:pPr indent="0" marL="0">
+              <a:buNone/>
+            </a:pPr>
+            <a:r>
+              <a:rPr lang="en-US" sz="1500" b="1" dirty="0">
+                <a:solidFill>
+                  <a:srgbClr val="FFFFFF"/>
+                </a:solidFill>
+                <a:latin typeface="Poppins" pitchFamily="34" charset="0"/>
+                <a:ea typeface="Poppins" pitchFamily="34" charset="-122"/>
+                <a:cs typeface="Poppins" pitchFamily="34" charset="-120"/>
+              </a:rPr>
+              <a:t>Barre de progression</a:t>
+            </a:r>
+            <a:endParaRPr lang="en-US" sz="1500" dirty="0"/>
+          </a:p>
+        </p:txBody>
+      </p:sp>
+      <p:sp>
+        <p:nvSpPr>
+          <p:cNvPr id="28" name="Text 26"/>
+          <p:cNvSpPr/>
+          <p:nvPr/>
+        </p:nvSpPr>
+        <p:spPr>
+          <a:xfrm>
+            <a:off x="6446520" y="5340096"/>
+            <a:ext cx="4937760" cy="502920"/>
+          </a:xfrm>
+          <a:prstGeom prst="rect">
+            <a:avLst/>
+          </a:prstGeom>
+          <a:noFill/>
+          <a:ln/>
+        </p:spPr>
+        <p:txBody>
+          <a:bodyPr wrap="square" lIns="0" tIns="0" rIns="0" bIns="0" rtlCol="0" anchor="t"/>
+          <a:lstStyle/>
+          <a:p>
+            <a:pPr indent="0" marL="0">
+              <a:lnSpc>
+                <a:spcPts val="1500"/>
+              </a:lnSpc>
+              <a:buNone/>
+            </a:pPr>
+            <a:r>
+              <a:rPr lang="en-US" sz="1150" dirty="0">
+                <a:solidFill>
+                  <a:srgbClr val="B8B8B8"/>
+                </a:solidFill>
+                <a:latin typeface="Poppins" pitchFamily="34" charset="0"/>
+                <a:ea typeface="Poppins" pitchFamily="34" charset="-122"/>
+                <a:cs typeface="Poppins" pitchFamily="34" charset="-120"/>
+              </a:rPr>
+              <a:t>Un indicateur visuel qui avance avec la lecture.</a:t>
+            </a:r>
+            <a:endParaRPr lang="en-US" sz="1150" dirty="0"/>
+          </a:p>
+        </p:txBody>
+      </p:sp>
+      <p:sp>
+        <p:nvSpPr>
+          <p:cNvPr id="29" name="Text 27"/>
+          <p:cNvSpPr/>
+          <p:nvPr/>
+        </p:nvSpPr>
+        <p:spPr>
+          <a:xfrm>
+            <a:off x="6446520" y="5833872"/>
+            <a:ext cx="4937760" cy="256032"/>
+          </a:xfrm>
+          <a:prstGeom prst="rect">
+            <a:avLst/>
+          </a:prstGeom>
+          <a:noFill/>
+          <a:ln/>
+        </p:spPr>
+        <p:txBody>
+          <a:bodyPr wrap="square" lIns="0" tIns="0" rIns="0" bIns="0" rtlCol="0" anchor="ctr"/>
+          <a:lstStyle/>
+          <a:p>
+            <a:pPr indent="0" marL="0">
+              <a:buNone/>
+            </a:pPr>
+            <a:r>
+              <a:rPr lang="en-US" sz="950" b="1" spc="100" kern="0" dirty="0">
+                <a:solidFill>
+                  <a:srgbClr val="6A6A6A"/>
+                </a:solidFill>
+                <a:latin typeface="Poppins" pitchFamily="34" charset="0"/>
+                <a:ea typeface="Poppins" pitchFamily="34" charset="-122"/>
+                <a:cs typeface="Poppins" pitchFamily="34" charset="-120"/>
+              </a:rPr>
+              <a:t>NOUVEAU</a:t>
+            </a:r>
+            <a:endParaRPr lang="en-US" sz="950" dirty="0"/>
           </a:p>
         </p:txBody>
       </p:sp>
@@ -2637,7 +3425,7 @@
                 <a:ea typeface="Poppins" pitchFamily="34" charset="-122"/>
                 <a:cs typeface="Poppins" pitchFamily="34" charset="-120"/>
               </a:rPr>
-              <a:t>   ·   EN ATELIER</a:t>
+              <a:t>   ·   PENDANT LE DESIGN</a:t>
             </a:r>
             <a:endParaRPr lang="en-US" sz="1200" dirty="0"/>
           </a:p>
@@ -2677,6 +3465,1870 @@
                 <a:cs typeface="Poppins" pitchFamily="34" charset="-120"/>
               </a:rPr>
               <a:t>11</a:t>
+            </a:r>
+            <a:endParaRPr lang="en-US" sz="1200" dirty="0"/>
+          </a:p>
+        </p:txBody>
+      </p:sp>
+      <p:sp>
+        <p:nvSpPr>
+          <p:cNvPr id="4" name="Text 2"/>
+          <p:cNvSpPr/>
+          <p:nvPr/>
+        </p:nvSpPr>
+        <p:spPr>
+          <a:xfrm>
+            <a:off x="548640" y="914400"/>
+            <a:ext cx="10972800" cy="731520"/>
+          </a:xfrm>
+          <a:prstGeom prst="rect">
+            <a:avLst/>
+          </a:prstGeom>
+          <a:noFill/>
+          <a:ln/>
+        </p:spPr>
+        <p:txBody>
+          <a:bodyPr wrap="square" lIns="0" tIns="0" rIns="0" bIns="0" rtlCol="0" anchor="ctr"/>
+          <a:lstStyle/>
+          <a:p>
+            <a:pPr indent="0" marL="0">
+              <a:buNone/>
+            </a:pPr>
+            <a:r>
+              <a:rPr lang="en-US" sz="3200" b="1" dirty="0">
+                <a:solidFill>
+                  <a:srgbClr val="FFFFFF"/>
+                </a:solidFill>
+                <a:latin typeface="Poppins" pitchFamily="34" charset="0"/>
+                <a:ea typeface="Poppins" pitchFamily="34" charset="-122"/>
+                <a:cs typeface="Poppins" pitchFamily="34" charset="-120"/>
+              </a:rPr>
+              <a:t>Sans les prototyper dans Figma</a:t>
+            </a:r>
+            <a:endParaRPr lang="en-US" sz="3200" dirty="0"/>
+          </a:p>
+        </p:txBody>
+      </p:sp>
+      <p:sp>
+        <p:nvSpPr>
+          <p:cNvPr id="5" name="Text 3"/>
+          <p:cNvSpPr/>
+          <p:nvPr/>
+        </p:nvSpPr>
+        <p:spPr>
+          <a:xfrm>
+            <a:off x="566928" y="1600200"/>
+            <a:ext cx="10058400" cy="457200"/>
+          </a:xfrm>
+          <a:prstGeom prst="rect">
+            <a:avLst/>
+          </a:prstGeom>
+          <a:noFill/>
+          <a:ln/>
+        </p:spPr>
+        <p:txBody>
+          <a:bodyPr wrap="square" lIns="0" tIns="0" rIns="0" bIns="0" rtlCol="0" anchor="ctr"/>
+          <a:lstStyle/>
+          <a:p>
+            <a:pPr indent="0" marL="0">
+              <a:buNone/>
+            </a:pPr>
+            <a:r>
+              <a:rPr lang="en-US" sz="1600" dirty="0">
+                <a:solidFill>
+                  <a:srgbClr val="B8B8B8"/>
+                </a:solidFill>
+                <a:latin typeface="Poppins" pitchFamily="34" charset="0"/>
+                <a:ea typeface="Poppins" pitchFamily="34" charset="-122"/>
+                <a:cs typeface="Poppins" pitchFamily="34" charset="-120"/>
+              </a:rPr>
+              <a:t>Juste y réfléchir pendant que vous travaillez le design.</a:t>
+            </a:r>
+            <a:endParaRPr lang="en-US" sz="1600" dirty="0"/>
+          </a:p>
+        </p:txBody>
+      </p:sp>
+      <p:sp>
+        <p:nvSpPr>
+          <p:cNvPr id="6" name="Shape 4"/>
+          <p:cNvSpPr/>
+          <p:nvPr/>
+        </p:nvSpPr>
+        <p:spPr>
+          <a:xfrm>
+            <a:off x="548640" y="2240280"/>
+            <a:ext cx="11064240" cy="1051560"/>
+          </a:xfrm>
+          <a:prstGeom prst="roundRect">
+            <a:avLst>
+              <a:gd name="adj" fmla="val 6087"/>
+            </a:avLst>
+          </a:prstGeom>
+          <a:solidFill>
+            <a:srgbClr val="161616"/>
+          </a:solidFill>
+          <a:ln w="19050">
+            <a:solidFill>
+              <a:srgbClr val="FF2B47"/>
+            </a:solidFill>
+            <a:prstDash val="solid"/>
+          </a:ln>
+        </p:spPr>
+      </p:sp>
+      <p:sp>
+        <p:nvSpPr>
+          <p:cNvPr id="7" name="Text 5"/>
+          <p:cNvSpPr/>
+          <p:nvPr/>
+        </p:nvSpPr>
+        <p:spPr>
+          <a:xfrm>
+            <a:off x="868680" y="2423160"/>
+            <a:ext cx="2743200" cy="365760"/>
+          </a:xfrm>
+          <a:prstGeom prst="rect">
+            <a:avLst/>
+          </a:prstGeom>
+          <a:noFill/>
+          <a:ln/>
+        </p:spPr>
+        <p:txBody>
+          <a:bodyPr wrap="square" lIns="0" tIns="0" rIns="0" bIns="0" rtlCol="0" anchor="ctr"/>
+          <a:lstStyle/>
+          <a:p>
+            <a:pPr indent="0" marL="0">
+              <a:buNone/>
+            </a:pPr>
+            <a:r>
+              <a:rPr lang="en-US" sz="1200" b="1" spc="200" kern="0" dirty="0">
+                <a:solidFill>
+                  <a:srgbClr val="FF2B47"/>
+                </a:solidFill>
+                <a:latin typeface="Poppins" pitchFamily="34" charset="0"/>
+                <a:ea typeface="Poppins" pitchFamily="34" charset="-122"/>
+                <a:cs typeface="Poppins" pitchFamily="34" charset="-120"/>
+              </a:rPr>
+              <a:t>OBLIGATOIRE</a:t>
+            </a:r>
+            <a:endParaRPr lang="en-US" sz="1200" dirty="0"/>
+          </a:p>
+        </p:txBody>
+      </p:sp>
+      <p:sp>
+        <p:nvSpPr>
+          <p:cNvPr id="8" name="Text 6"/>
+          <p:cNvSpPr/>
+          <p:nvPr/>
+        </p:nvSpPr>
+        <p:spPr>
+          <a:xfrm>
+            <a:off x="868680" y="2788920"/>
+            <a:ext cx="10424160" cy="457200"/>
+          </a:xfrm>
+          <a:prstGeom prst="rect">
+            <a:avLst/>
+          </a:prstGeom>
+          <a:noFill/>
+          <a:ln/>
+        </p:spPr>
+        <p:txBody>
+          <a:bodyPr wrap="square" lIns="0" tIns="0" rIns="0" bIns="0" rtlCol="0" anchor="ctr"/>
+          <a:lstStyle/>
+          <a:p>
+            <a:pPr indent="0" marL="0">
+              <a:buNone/>
+            </a:pPr>
+            <a:r>
+              <a:rPr lang="en-US" sz="1800" b="1" dirty="0">
+                <a:solidFill>
+                  <a:srgbClr val="FFFFFF"/>
+                </a:solidFill>
+                <a:latin typeface="Poppins" pitchFamily="34" charset="0"/>
+                <a:ea typeface="Poppins" pitchFamily="34" charset="-122"/>
+                <a:cs typeface="Poppins" pitchFamily="34" charset="-120"/>
+              </a:rPr>
+              <a:t>Animations pilotées par le défilement (scroll)</a:t>
+            </a:r>
+            <a:endParaRPr lang="en-US" sz="1800" dirty="0"/>
+          </a:p>
+        </p:txBody>
+      </p:sp>
+      <p:sp>
+        <p:nvSpPr>
+          <p:cNvPr id="9" name="Shape 7"/>
+          <p:cNvSpPr/>
+          <p:nvPr/>
+        </p:nvSpPr>
+        <p:spPr>
+          <a:xfrm>
+            <a:off x="548640" y="3474720"/>
+            <a:ext cx="11064240" cy="1051560"/>
+          </a:xfrm>
+          <a:prstGeom prst="roundRect">
+            <a:avLst>
+              <a:gd name="adj" fmla="val 6087"/>
+            </a:avLst>
+          </a:prstGeom>
+          <a:solidFill>
+            <a:srgbClr val="161616"/>
+          </a:solidFill>
+          <a:ln/>
+        </p:spPr>
+      </p:sp>
+      <p:sp>
+        <p:nvSpPr>
+          <p:cNvPr id="10" name="Text 8"/>
+          <p:cNvSpPr/>
+          <p:nvPr/>
+        </p:nvSpPr>
+        <p:spPr>
+          <a:xfrm>
+            <a:off x="868680" y="3657600"/>
+            <a:ext cx="2743200" cy="365760"/>
+          </a:xfrm>
+          <a:prstGeom prst="rect">
+            <a:avLst/>
+          </a:prstGeom>
+          <a:noFill/>
+          <a:ln/>
+        </p:spPr>
+        <p:txBody>
+          <a:bodyPr wrap="square" lIns="0" tIns="0" rIns="0" bIns="0" rtlCol="0" anchor="ctr"/>
+          <a:lstStyle/>
+          <a:p>
+            <a:pPr indent="0" marL="0">
+              <a:buNone/>
+            </a:pPr>
+            <a:r>
+              <a:rPr lang="en-US" sz="1200" b="1" spc="200" kern="0" dirty="0">
+                <a:solidFill>
+                  <a:srgbClr val="6A6A6A"/>
+                </a:solidFill>
+                <a:latin typeface="Poppins" pitchFamily="34" charset="0"/>
+                <a:ea typeface="Poppins" pitchFamily="34" charset="-122"/>
+                <a:cs typeface="Poppins" pitchFamily="34" charset="-120"/>
+              </a:rPr>
+              <a:t>À CONSIDÉRER</a:t>
+            </a:r>
+            <a:endParaRPr lang="en-US" sz="1200" dirty="0"/>
+          </a:p>
+        </p:txBody>
+      </p:sp>
+      <p:sp>
+        <p:nvSpPr>
+          <p:cNvPr id="11" name="Text 9"/>
+          <p:cNvSpPr/>
+          <p:nvPr/>
+        </p:nvSpPr>
+        <p:spPr>
+          <a:xfrm>
+            <a:off x="868680" y="4023360"/>
+            <a:ext cx="10424160" cy="457200"/>
+          </a:xfrm>
+          <a:prstGeom prst="rect">
+            <a:avLst/>
+          </a:prstGeom>
+          <a:noFill/>
+          <a:ln/>
+        </p:spPr>
+        <p:txBody>
+          <a:bodyPr wrap="square" lIns="0" tIns="0" rIns="0" bIns="0" rtlCol="0" anchor="ctr"/>
+          <a:lstStyle/>
+          <a:p>
+            <a:pPr indent="0" marL="0">
+              <a:buNone/>
+            </a:pPr>
+            <a:r>
+              <a:rPr lang="en-US" sz="1700" dirty="0">
+                <a:solidFill>
+                  <a:srgbClr val="B8B8B8"/>
+                </a:solidFill>
+                <a:latin typeface="Poppins" pitchFamily="34" charset="0"/>
+                <a:ea typeface="Poppins" pitchFamily="34" charset="-122"/>
+                <a:cs typeface="Poppins" pitchFamily="34" charset="-120"/>
+              </a:rPr>
+              <a:t>Interactions dynamiques : survol, clic, transition vers une autre page</a:t>
+            </a:r>
+            <a:endParaRPr lang="en-US" sz="1700" dirty="0"/>
+          </a:p>
+        </p:txBody>
+      </p:sp>
+      <p:sp>
+        <p:nvSpPr>
+          <p:cNvPr id="12" name="Text 10"/>
+          <p:cNvSpPr/>
+          <p:nvPr/>
+        </p:nvSpPr>
+        <p:spPr>
+          <a:xfrm>
+            <a:off x="548640" y="4800600"/>
+            <a:ext cx="10972800" cy="548640"/>
+          </a:xfrm>
+          <a:prstGeom prst="rect">
+            <a:avLst/>
+          </a:prstGeom>
+          <a:noFill/>
+          <a:ln/>
+        </p:spPr>
+        <p:txBody>
+          <a:bodyPr wrap="square" lIns="0" tIns="0" rIns="0" bIns="0" rtlCol="0" anchor="ctr"/>
+          <a:lstStyle/>
+          <a:p>
+            <a:pPr indent="0" marL="0">
+              <a:buNone/>
+            </a:pPr>
+            <a:r>
+              <a:rPr lang="en-US" sz="1500" i="1" dirty="0">
+                <a:solidFill>
+                  <a:srgbClr val="6A6A6A"/>
+                </a:solidFill>
+                <a:latin typeface="Poppins" pitchFamily="34" charset="0"/>
+                <a:ea typeface="Poppins" pitchFamily="34" charset="-122"/>
+                <a:cs typeface="Poppins" pitchFamily="34" charset="-120"/>
+              </a:rPr>
+              <a:t>Pas besoin de connaître GSAP ou le scroll-driven aujourd'hui, ça viendra plus tard dans la session. On planifie l'idée, pas la technique.</a:t>
+            </a:r>
+            <a:endParaRPr lang="en-US" sz="1500" dirty="0"/>
+          </a:p>
+        </p:txBody>
+      </p:sp>
+      <p:sp>
+        <p:nvSpPr>
+          <p:cNvPr id="13" name="Text 11"/>
+          <p:cNvSpPr/>
+          <p:nvPr/>
+        </p:nvSpPr>
+        <p:spPr>
+          <a:xfrm>
+            <a:off x="548640" y="5486400"/>
+            <a:ext cx="7315200" cy="320040"/>
+          </a:xfrm>
+          <a:prstGeom prst="rect">
+            <a:avLst/>
+          </a:prstGeom>
+          <a:noFill/>
+          <a:ln/>
+        </p:spPr>
+        <p:txBody>
+          <a:bodyPr wrap="square" lIns="0" tIns="0" rIns="0" bIns="0" rtlCol="0" anchor="ctr"/>
+          <a:lstStyle/>
+          <a:p>
+            <a:pPr indent="0" marL="0">
+              <a:buNone/>
+            </a:pPr>
+            <a:r>
+              <a:rPr lang="en-US" sz="1100" b="1" spc="200" kern="0" dirty="0">
+                <a:solidFill>
+                  <a:srgbClr val="6A6A6A"/>
+                </a:solidFill>
+                <a:latin typeface="Poppins" pitchFamily="34" charset="0"/>
+                <a:ea typeface="Poppins" pitchFamily="34" charset="-122"/>
+                <a:cs typeface="Poppins" pitchFamily="34" charset="-120"/>
+              </a:rPr>
+              <a:t>À DOCUMENTER DANS PLANIFICATION.MD</a:t>
+            </a:r>
+            <a:endParaRPr lang="en-US" sz="1100" dirty="0"/>
+          </a:p>
+        </p:txBody>
+      </p:sp>
+      <p:sp>
+        <p:nvSpPr>
+          <p:cNvPr id="14" name="Text 12"/>
+          <p:cNvSpPr/>
+          <p:nvPr/>
+        </p:nvSpPr>
+        <p:spPr>
+          <a:xfrm>
+            <a:off x="548640" y="5806440"/>
+            <a:ext cx="7315200" cy="457200"/>
+          </a:xfrm>
+          <a:prstGeom prst="rect">
+            <a:avLst/>
+          </a:prstGeom>
+          <a:noFill/>
+          <a:ln/>
+        </p:spPr>
+        <p:txBody>
+          <a:bodyPr wrap="square" lIns="0" tIns="0" rIns="0" bIns="0" rtlCol="0" anchor="ctr"/>
+          <a:lstStyle/>
+          <a:p>
+            <a:pPr indent="0" marL="0">
+              <a:buNone/>
+            </a:pPr>
+            <a:r>
+              <a:rPr lang="en-US" sz="1500" dirty="0">
+                <a:solidFill>
+                  <a:srgbClr val="8DDBA0"/>
+                </a:solidFill>
+                <a:latin typeface="Consolas" pitchFamily="34" charset="0"/>
+                <a:ea typeface="Consolas" pitchFamily="34" charset="-122"/>
+                <a:cs typeface="Consolas" pitchFamily="34" charset="-120"/>
+              </a:rPr>
+              <a:t>Quoi animer  ·  Comment  ·  À quel événement utilisateur</a:t>
+            </a:r>
+            <a:endParaRPr lang="en-US" sz="1500" dirty="0"/>
+          </a:p>
+        </p:txBody>
+      </p:sp>
+      <p:sp>
+        <p:nvSpPr>
+          <p:cNvPr id="15" name="Text 13"/>
+          <p:cNvSpPr/>
+          <p:nvPr/>
+        </p:nvSpPr>
+        <p:spPr>
+          <a:xfrm>
+            <a:off x="9601200" y="5532120"/>
+            <a:ext cx="2011680" cy="274320"/>
+          </a:xfrm>
+          <a:prstGeom prst="rect">
+            <a:avLst/>
+          </a:prstGeom>
+          <a:noFill/>
+          <a:ln/>
+        </p:spPr>
+        <p:txBody>
+          <a:bodyPr wrap="square" lIns="0" tIns="0" rIns="0" bIns="0" rtlCol="0" anchor="ctr"/>
+          <a:lstStyle/>
+          <a:p>
+            <a:pPr algn="r" indent="0" marL="0">
+              <a:buNone/>
+            </a:pPr>
+            <a:r>
+              <a:rPr lang="en-US" sz="1000" b="1" spc="100" kern="0" dirty="0">
+                <a:solidFill>
+                  <a:srgbClr val="FF2B47"/>
+                </a:solidFill>
+                <a:latin typeface="Poppins" pitchFamily="34" charset="0"/>
+                <a:ea typeface="Poppins" pitchFamily="34" charset="-122"/>
+                <a:cs typeface="Poppins" pitchFamily="34" charset="-120"/>
+              </a:rPr>
+              <a:t>EXIGÉ · REMISE 1</a:t>
+            </a:r>
+            <a:endParaRPr lang="en-US" sz="1000" dirty="0"/>
+          </a:p>
+        </p:txBody>
+      </p:sp>
+    </p:spTree>
+  </p:cSld>
+  <p:clrMapOvr>
+    <a:masterClrMapping/>
+  </p:clrMapOvr>
+</p:sld>
+</file>
+
+<file path=ppt/slides/slide12.xml><?xml version="1.0" encoding="utf-8"?>
+<p:sld xmlns:a="http://schemas.openxmlformats.org/drawingml/2006/main" xmlns:r="http://schemas.openxmlformats.org/officeDocument/2006/relationships" xmlns:p="http://schemas.openxmlformats.org/presentationml/2006/main">
+  <p:cSld name="Slide 12">
+    <p:bg>
+      <p:bgPr>
+        <a:solidFill>
+          <a:srgbClr val="0A0A0A"/>
+        </a:solidFill>
+      </p:bgPr>
+    </p:bg>
+    <p:spTree>
+      <p:nvGrpSpPr>
+        <p:cNvPr id="1" name=""/>
+        <p:cNvGrpSpPr/>
+        <p:nvPr/>
+      </p:nvGrpSpPr>
+      <p:grpSpPr>
+        <a:xfrm>
+          <a:off x="0" y="0"/>
+          <a:ext cx="0" cy="0"/>
+          <a:chOff x="0" y="0"/>
+          <a:chExt cx="0" cy="0"/>
+        </a:xfrm>
+      </p:grpSpPr>
+      <p:sp>
+        <p:nvSpPr>
+          <p:cNvPr id="2" name="Text 0"/>
+          <p:cNvSpPr/>
+          <p:nvPr/>
+        </p:nvSpPr>
+        <p:spPr>
+          <a:xfrm>
+            <a:off x="548640" y="384048"/>
+            <a:ext cx="10515600" cy="365760"/>
+          </a:xfrm>
+          <a:prstGeom prst="rect">
+            <a:avLst/>
+          </a:prstGeom>
+          <a:noFill/>
+          <a:ln/>
+        </p:spPr>
+        <p:txBody>
+          <a:bodyPr wrap="square" lIns="0" tIns="0" rIns="0" bIns="0" rtlCol="0" anchor="ctr"/>
+          <a:lstStyle/>
+          <a:p>
+            <a:pPr algn="l" indent="0" marL="0">
+              <a:buNone/>
+            </a:pPr>
+            <a:r>
+              <a:rPr lang="en-US" sz="1200" b="1" spc="300" kern="0" dirty="0">
+                <a:solidFill>
+                  <a:srgbClr val="FF2B47"/>
+                </a:solidFill>
+                <a:latin typeface="Poppins" pitchFamily="34" charset="0"/>
+                <a:ea typeface="Poppins" pitchFamily="34" charset="-122"/>
+                <a:cs typeface="Poppins" pitchFamily="34" charset="-120"/>
+              </a:rPr>
+              <a:t>WEB 5</a:t>
+            </a:r>
+            <a:pPr algn="l" indent="0" marL="0">
+              <a:buNone/>
+            </a:pPr>
+            <a:r>
+              <a:rPr lang="en-US" sz="1200" spc="300" kern="0" dirty="0">
+                <a:solidFill>
+                  <a:srgbClr val="6A6A6A"/>
+                </a:solidFill>
+                <a:latin typeface="Poppins" pitchFamily="34" charset="0"/>
+                <a:ea typeface="Poppins" pitchFamily="34" charset="-122"/>
+                <a:cs typeface="Poppins" pitchFamily="34" charset="-120"/>
+              </a:rPr>
+              <a:t>   ·   INSPIRATION</a:t>
+            </a:r>
+            <a:endParaRPr lang="en-US" sz="1200" dirty="0"/>
+          </a:p>
+        </p:txBody>
+      </p:sp>
+      <p:sp>
+        <p:nvSpPr>
+          <p:cNvPr id="3" name="Text 1"/>
+          <p:cNvSpPr/>
+          <p:nvPr/>
+        </p:nvSpPr>
+        <p:spPr>
+          <a:xfrm>
+            <a:off x="10881360" y="6199632"/>
+            <a:ext cx="731520" cy="365760"/>
+          </a:xfrm>
+          <a:prstGeom prst="rect">
+            <a:avLst/>
+          </a:prstGeom>
+          <a:noFill/>
+          <a:ln/>
+        </p:spPr>
+        <p:txBody>
+          <a:bodyPr wrap="square" lIns="0" tIns="0" rIns="0" bIns="0" rtlCol="0" anchor="ctr"/>
+          <a:lstStyle/>
+          <a:p>
+            <a:pPr algn="r" indent="0" marL="0">
+              <a:buNone/>
+            </a:pPr>
+            <a:r>
+              <a:rPr lang="en-US" sz="1200" dirty="0">
+                <a:solidFill>
+                  <a:srgbClr val="6A6A6A"/>
+                </a:solidFill>
+                <a:latin typeface="Poppins" pitchFamily="34" charset="0"/>
+                <a:ea typeface="Poppins" pitchFamily="34" charset="-122"/>
+                <a:cs typeface="Poppins" pitchFamily="34" charset="-120"/>
+              </a:rPr>
+              <a:t>12</a:t>
+            </a:r>
+            <a:endParaRPr lang="en-US" sz="1200" dirty="0"/>
+          </a:p>
+        </p:txBody>
+      </p:sp>
+      <p:sp>
+        <p:nvSpPr>
+          <p:cNvPr id="4" name="Text 2"/>
+          <p:cNvSpPr/>
+          <p:nvPr/>
+        </p:nvSpPr>
+        <p:spPr>
+          <a:xfrm>
+            <a:off x="548640" y="914400"/>
+            <a:ext cx="10972800" cy="731520"/>
+          </a:xfrm>
+          <a:prstGeom prst="rect">
+            <a:avLst/>
+          </a:prstGeom>
+          <a:noFill/>
+          <a:ln/>
+        </p:spPr>
+        <p:txBody>
+          <a:bodyPr wrap="square" lIns="0" tIns="0" rIns="0" bIns="0" rtlCol="0" anchor="ctr"/>
+          <a:lstStyle/>
+          <a:p>
+            <a:pPr indent="0" marL="0">
+              <a:buNone/>
+            </a:pPr>
+            <a:r>
+              <a:rPr lang="en-US" sz="3200" b="1" dirty="0">
+                <a:solidFill>
+                  <a:srgbClr val="FFFFFF"/>
+                </a:solidFill>
+                <a:latin typeface="Poppins" pitchFamily="34" charset="0"/>
+                <a:ea typeface="Poppins" pitchFamily="34" charset="-122"/>
+                <a:cs typeface="Poppins" pitchFamily="34" charset="-120"/>
+              </a:rPr>
+              <a:t>Des exemples pour s'inspirer</a:t>
+            </a:r>
+            <a:endParaRPr lang="en-US" sz="3200" dirty="0"/>
+          </a:p>
+        </p:txBody>
+      </p:sp>
+      <p:sp>
+        <p:nvSpPr>
+          <p:cNvPr id="5" name="Text 3"/>
+          <p:cNvSpPr/>
+          <p:nvPr/>
+        </p:nvSpPr>
+        <p:spPr>
+          <a:xfrm>
+            <a:off x="566928" y="1600200"/>
+            <a:ext cx="10058400" cy="457200"/>
+          </a:xfrm>
+          <a:prstGeom prst="rect">
+            <a:avLst/>
+          </a:prstGeom>
+          <a:noFill/>
+          <a:ln/>
+        </p:spPr>
+        <p:txBody>
+          <a:bodyPr wrap="square" lIns="0" tIns="0" rIns="0" bIns="0" rtlCol="0" anchor="ctr"/>
+          <a:lstStyle/>
+          <a:p>
+            <a:pPr indent="0" marL="0">
+              <a:buNone/>
+            </a:pPr>
+            <a:r>
+              <a:rPr lang="en-US" sz="1600" dirty="0">
+                <a:solidFill>
+                  <a:srgbClr val="B8B8B8"/>
+                </a:solidFill>
+                <a:latin typeface="Poppins" pitchFamily="34" charset="0"/>
+                <a:ea typeface="Poppins" pitchFamily="34" charset="-122"/>
+                <a:cs typeface="Poppins" pitchFamily="34" charset="-120"/>
+              </a:rPr>
+              <a:t>À explorer avant ou pendant l'atelier :</a:t>
+            </a:r>
+            <a:endParaRPr lang="en-US" sz="1600" dirty="0"/>
+          </a:p>
+        </p:txBody>
+      </p:sp>
+      <p:sp>
+        <p:nvSpPr>
+          <p:cNvPr id="6" name="Shape 4"/>
+          <p:cNvSpPr/>
+          <p:nvPr/>
+        </p:nvSpPr>
+        <p:spPr>
+          <a:xfrm>
+            <a:off x="548640" y="2331720"/>
+            <a:ext cx="11064240" cy="896112"/>
+          </a:xfrm>
+          <a:prstGeom prst="roundRect">
+            <a:avLst>
+              <a:gd name="adj" fmla="val 7143"/>
+            </a:avLst>
+          </a:prstGeom>
+          <a:solidFill>
+            <a:srgbClr val="161616"/>
+          </a:solidFill>
+          <a:ln/>
+        </p:spPr>
+      </p:sp>
+      <p:sp>
+        <p:nvSpPr>
+          <p:cNvPr id="7" name="Text 5">
+            <a:hlinkClick r:id="rId1" tooltip=""/>
+          </p:cNvPr>
+          <p:cNvSpPr/>
+          <p:nvPr/>
+        </p:nvSpPr>
+        <p:spPr>
+          <a:xfrm>
+            <a:off x="868680" y="2423160"/>
+            <a:ext cx="3840480" cy="713232"/>
+          </a:xfrm>
+          <a:prstGeom prst="rect">
+            <a:avLst/>
+          </a:prstGeom>
+          <a:noFill/>
+          <a:ln/>
+        </p:spPr>
+        <p:txBody>
+          <a:bodyPr wrap="square" lIns="0" tIns="0" rIns="0" bIns="0" rtlCol="0" anchor="ctr"/>
+          <a:lstStyle/>
+          <a:p>
+            <a:pPr indent="0" marL="0">
+              <a:buNone/>
+            </a:pPr>
+            <a:r>
+              <a:rPr lang="en-US" sz="1500" b="1" u="sng" dirty="0">
+                <a:solidFill>
+                  <a:srgbClr val="FF2B47"/>
+                </a:solidFill>
+                <a:latin typeface="Poppins" pitchFamily="34" charset="0"/>
+                <a:ea typeface="Poppins" pitchFamily="34" charset="-122"/>
+                <a:cs typeface="Poppins" pitchFamily="34" charset="-120"/>
+                <a:hlinkClick r:id="rId1" invalidUrl="" action="" tgtFrame="" tooltip="" history="1" highlightClick="0" endSnd="0">
+                  <a:extLst>
+                    <a:ext uri="{A12FA001-AC4F-418D-AE19-62706E023703}">
+                      <ahyp:hlinkClr xmlns:ahyp="http://schemas.microsoft.com/office/drawing/2018/hyperlinkcolor" val="tx"/>
+                    </a:ext>
+                  </a:extLst>
+                </a:hlinkClick>
+              </a:rPr>
+              <a:t>Best Parallax Websites</a:t>
+            </a:r>
+            <a:endParaRPr lang="en-US" sz="1500" dirty="0"/>
+          </a:p>
+        </p:txBody>
+      </p:sp>
+      <p:sp>
+        <p:nvSpPr>
+          <p:cNvPr id="8" name="Text 6"/>
+          <p:cNvSpPr/>
+          <p:nvPr/>
+        </p:nvSpPr>
+        <p:spPr>
+          <a:xfrm>
+            <a:off x="4892040" y="2423160"/>
+            <a:ext cx="5120640" cy="713232"/>
+          </a:xfrm>
+          <a:prstGeom prst="rect">
+            <a:avLst/>
+          </a:prstGeom>
+          <a:noFill/>
+          <a:ln/>
+        </p:spPr>
+        <p:txBody>
+          <a:bodyPr wrap="square" lIns="0" tIns="0" rIns="0" bIns="0" rtlCol="0" anchor="ctr"/>
+          <a:lstStyle/>
+          <a:p>
+            <a:pPr indent="0" marL="0">
+              <a:buNone/>
+            </a:pPr>
+            <a:r>
+              <a:rPr lang="en-US" sz="1250" dirty="0">
+                <a:solidFill>
+                  <a:srgbClr val="B8B8B8"/>
+                </a:solidFill>
+                <a:latin typeface="Poppins" pitchFamily="34" charset="0"/>
+                <a:ea typeface="Poppins" pitchFamily="34" charset="-122"/>
+                <a:cs typeface="Poppins" pitchFamily="34" charset="-120"/>
+              </a:rPr>
+              <a:t>Collection vivante de sites primés, plusieurs variantes de l'effet.</a:t>
+            </a:r>
+            <a:endParaRPr lang="en-US" sz="1250" dirty="0"/>
+          </a:p>
+        </p:txBody>
+      </p:sp>
+      <p:sp>
+        <p:nvSpPr>
+          <p:cNvPr id="9" name="Shape 7"/>
+          <p:cNvSpPr/>
+          <p:nvPr/>
+        </p:nvSpPr>
+        <p:spPr>
+          <a:xfrm>
+            <a:off x="548640" y="3337560"/>
+            <a:ext cx="11064240" cy="896112"/>
+          </a:xfrm>
+          <a:prstGeom prst="roundRect">
+            <a:avLst>
+              <a:gd name="adj" fmla="val 7143"/>
+            </a:avLst>
+          </a:prstGeom>
+          <a:solidFill>
+            <a:srgbClr val="161616"/>
+          </a:solidFill>
+          <a:ln/>
+        </p:spPr>
+      </p:sp>
+      <p:sp>
+        <p:nvSpPr>
+          <p:cNvPr id="10" name="Text 8">
+            <a:hlinkClick r:id="rId2" tooltip=""/>
+          </p:cNvPr>
+          <p:cNvSpPr/>
+          <p:nvPr/>
+        </p:nvSpPr>
+        <p:spPr>
+          <a:xfrm>
+            <a:off x="868680" y="3429000"/>
+            <a:ext cx="3840480" cy="713232"/>
+          </a:xfrm>
+          <a:prstGeom prst="rect">
+            <a:avLst/>
+          </a:prstGeom>
+          <a:noFill/>
+          <a:ln/>
+        </p:spPr>
+        <p:txBody>
+          <a:bodyPr wrap="square" lIns="0" tIns="0" rIns="0" bIns="0" rtlCol="0" anchor="ctr"/>
+          <a:lstStyle/>
+          <a:p>
+            <a:pPr indent="0" marL="0">
+              <a:buNone/>
+            </a:pPr>
+            <a:r>
+              <a:rPr lang="en-US" sz="1500" b="1" u="sng" dirty="0">
+                <a:solidFill>
+                  <a:srgbClr val="FF2B47"/>
+                </a:solidFill>
+                <a:latin typeface="Poppins" pitchFamily="34" charset="0"/>
+                <a:ea typeface="Poppins" pitchFamily="34" charset="-122"/>
+                <a:cs typeface="Poppins" pitchFamily="34" charset="-120"/>
+                <a:hlinkClick r:id="rId2" invalidUrl="" action="" tgtFrame="" tooltip="" history="1" highlightClick="0" endSnd="0">
+                  <a:extLst>
+                    <a:ext uri="{A12FA001-AC4F-418D-AE19-62706E023703}">
+                      <ahyp:hlinkClr xmlns:ahyp="http://schemas.microsoft.com/office/drawing/2018/hyperlinkcolor" val="tx"/>
+                    </a:ext>
+                  </a:extLst>
+                </a:hlinkClick>
+              </a:rPr>
+              <a:t>Best Scroll Websites</a:t>
+            </a:r>
+            <a:endParaRPr lang="en-US" sz="1500" dirty="0"/>
+          </a:p>
+        </p:txBody>
+      </p:sp>
+      <p:sp>
+        <p:nvSpPr>
+          <p:cNvPr id="11" name="Text 9"/>
+          <p:cNvSpPr/>
+          <p:nvPr/>
+        </p:nvSpPr>
+        <p:spPr>
+          <a:xfrm>
+            <a:off x="4892040" y="3429000"/>
+            <a:ext cx="5120640" cy="713232"/>
+          </a:xfrm>
+          <a:prstGeom prst="rect">
+            <a:avLst/>
+          </a:prstGeom>
+          <a:noFill/>
+          <a:ln/>
+        </p:spPr>
+        <p:txBody>
+          <a:bodyPr wrap="square" lIns="0" tIns="0" rIns="0" bIns="0" rtlCol="0" anchor="ctr"/>
+          <a:lstStyle/>
+          <a:p>
+            <a:pPr indent="0" marL="0">
+              <a:buNone/>
+            </a:pPr>
+            <a:r>
+              <a:rPr lang="en-US" sz="1250" dirty="0">
+                <a:solidFill>
+                  <a:srgbClr val="B8B8B8"/>
+                </a:solidFill>
+                <a:latin typeface="Poppins" pitchFamily="34" charset="0"/>
+                <a:ea typeface="Poppins" pitchFamily="34" charset="-122"/>
+                <a:cs typeface="Poppins" pitchFamily="34" charset="-120"/>
+              </a:rPr>
+              <a:t>Sites où le défilement est au cœur de l'expérience.</a:t>
+            </a:r>
+            <a:endParaRPr lang="en-US" sz="1250" dirty="0"/>
+          </a:p>
+        </p:txBody>
+      </p:sp>
+      <p:sp>
+        <p:nvSpPr>
+          <p:cNvPr id="12" name="Shape 10"/>
+          <p:cNvSpPr/>
+          <p:nvPr/>
+        </p:nvSpPr>
+        <p:spPr>
+          <a:xfrm>
+            <a:off x="548640" y="4343400"/>
+            <a:ext cx="11064240" cy="896112"/>
+          </a:xfrm>
+          <a:prstGeom prst="roundRect">
+            <a:avLst>
+              <a:gd name="adj" fmla="val 7143"/>
+            </a:avLst>
+          </a:prstGeom>
+          <a:solidFill>
+            <a:srgbClr val="161616"/>
+          </a:solidFill>
+          <a:ln/>
+        </p:spPr>
+      </p:sp>
+      <p:sp>
+        <p:nvSpPr>
+          <p:cNvPr id="13" name="Text 11">
+            <a:hlinkClick r:id="rId3" tooltip=""/>
+          </p:cNvPr>
+          <p:cNvSpPr/>
+          <p:nvPr/>
+        </p:nvSpPr>
+        <p:spPr>
+          <a:xfrm>
+            <a:off x="868680" y="4434840"/>
+            <a:ext cx="3840480" cy="713232"/>
+          </a:xfrm>
+          <a:prstGeom prst="rect">
+            <a:avLst/>
+          </a:prstGeom>
+          <a:noFill/>
+          <a:ln/>
+        </p:spPr>
+        <p:txBody>
+          <a:bodyPr wrap="square" lIns="0" tIns="0" rIns="0" bIns="0" rtlCol="0" anchor="ctr"/>
+          <a:lstStyle/>
+          <a:p>
+            <a:pPr indent="0" marL="0">
+              <a:buNone/>
+            </a:pPr>
+            <a:r>
+              <a:rPr lang="en-US" sz="1500" b="1" u="sng" dirty="0">
+                <a:solidFill>
+                  <a:srgbClr val="FF2B47"/>
+                </a:solidFill>
+                <a:latin typeface="Poppins" pitchFamily="34" charset="0"/>
+                <a:ea typeface="Poppins" pitchFamily="34" charset="-122"/>
+                <a:cs typeface="Poppins" pitchFamily="34" charset="-120"/>
+                <a:hlinkClick r:id="rId3" invalidUrl="" action="" tgtFrame="" tooltip="" history="1" highlightClick="0" endSnd="0">
+                  <a:extLst>
+                    <a:ext uri="{A12FA001-AC4F-418D-AE19-62706E023703}">
+                      <ahyp:hlinkClr xmlns:ahyp="http://schemas.microsoft.com/office/drawing/2018/hyperlinkcolor" val="tx"/>
+                    </a:ext>
+                  </a:extLst>
+                </a:hlinkClick>
+              </a:rPr>
+              <a:t>Collection Parallax : variantes</a:t>
+            </a:r>
+            <a:endParaRPr lang="en-US" sz="1500" dirty="0"/>
+          </a:p>
+        </p:txBody>
+      </p:sp>
+      <p:sp>
+        <p:nvSpPr>
+          <p:cNvPr id="14" name="Text 12"/>
+          <p:cNvSpPr/>
+          <p:nvPr/>
+        </p:nvSpPr>
+        <p:spPr>
+          <a:xfrm>
+            <a:off x="4892040" y="4434840"/>
+            <a:ext cx="5120640" cy="713232"/>
+          </a:xfrm>
+          <a:prstGeom prst="rect">
+            <a:avLst/>
+          </a:prstGeom>
+          <a:noFill/>
+          <a:ln/>
+        </p:spPr>
+        <p:txBody>
+          <a:bodyPr wrap="square" lIns="0" tIns="0" rIns="0" bIns="0" rtlCol="0" anchor="ctr"/>
+          <a:lstStyle/>
+          <a:p>
+            <a:pPr indent="0" marL="0">
+              <a:buNone/>
+            </a:pPr>
+            <a:r>
+              <a:rPr lang="en-US" sz="1250" dirty="0">
+                <a:solidFill>
+                  <a:srgbClr val="B8B8B8"/>
+                </a:solidFill>
+                <a:latin typeface="Poppins" pitchFamily="34" charset="0"/>
+                <a:ea typeface="Poppins" pitchFamily="34" charset="-122"/>
+                <a:cs typeface="Poppins" pitchFamily="34" charset="-120"/>
+              </a:rPr>
+              <a:t>Scroll horizontal, navigation canvas, typographie à glisser.</a:t>
+            </a:r>
+            <a:endParaRPr lang="en-US" sz="1250" dirty="0"/>
+          </a:p>
+        </p:txBody>
+      </p:sp>
+      <p:sp>
+        <p:nvSpPr>
+          <p:cNvPr id="15" name="Shape 13"/>
+          <p:cNvSpPr/>
+          <p:nvPr/>
+        </p:nvSpPr>
+        <p:spPr>
+          <a:xfrm>
+            <a:off x="548640" y="5349240"/>
+            <a:ext cx="11064240" cy="896112"/>
+          </a:xfrm>
+          <a:prstGeom prst="roundRect">
+            <a:avLst>
+              <a:gd name="adj" fmla="val 7143"/>
+            </a:avLst>
+          </a:prstGeom>
+          <a:solidFill>
+            <a:srgbClr val="161616"/>
+          </a:solidFill>
+          <a:ln/>
+        </p:spPr>
+      </p:sp>
+      <p:sp>
+        <p:nvSpPr>
+          <p:cNvPr id="16" name="Text 14">
+            <a:hlinkClick r:id="rId4" tooltip=""/>
+          </p:cNvPr>
+          <p:cNvSpPr/>
+          <p:nvPr/>
+        </p:nvSpPr>
+        <p:spPr>
+          <a:xfrm>
+            <a:off x="868680" y="5440680"/>
+            <a:ext cx="3840480" cy="713232"/>
+          </a:xfrm>
+          <a:prstGeom prst="rect">
+            <a:avLst/>
+          </a:prstGeom>
+          <a:noFill/>
+          <a:ln/>
+        </p:spPr>
+        <p:txBody>
+          <a:bodyPr wrap="square" lIns="0" tIns="0" rIns="0" bIns="0" rtlCol="0" anchor="ctr"/>
+          <a:lstStyle/>
+          <a:p>
+            <a:pPr indent="0" marL="0">
+              <a:buNone/>
+            </a:pPr>
+            <a:r>
+              <a:rPr lang="en-US" sz="1500" b="1" u="sng" dirty="0">
+                <a:solidFill>
+                  <a:srgbClr val="FF2B47"/>
+                </a:solidFill>
+                <a:latin typeface="Poppins" pitchFamily="34" charset="0"/>
+                <a:ea typeface="Poppins" pitchFamily="34" charset="-122"/>
+                <a:cs typeface="Poppins" pitchFamily="34" charset="-120"/>
+                <a:hlinkClick r:id="rId4" invalidUrl="" action="" tgtFrame="" tooltip="" history="1" highlightClick="0" endSnd="0">
+                  <a:extLst>
+                    <a:ext uri="{A12FA001-AC4F-418D-AE19-62706E023703}">
+                      <ahyp:hlinkClr xmlns:ahyp="http://schemas.microsoft.com/office/drawing/2018/hyperlinkcolor" val="tx"/>
+                    </a:ext>
+                  </a:extLst>
+                </a:hlinkClick>
+              </a:rPr>
+              <a:t>20 GSAP ScrollTrigger Examples</a:t>
+            </a:r>
+            <a:endParaRPr lang="en-US" sz="1500" dirty="0"/>
+          </a:p>
+        </p:txBody>
+      </p:sp>
+      <p:sp>
+        <p:nvSpPr>
+          <p:cNvPr id="17" name="Text 15"/>
+          <p:cNvSpPr/>
+          <p:nvPr/>
+        </p:nvSpPr>
+        <p:spPr>
+          <a:xfrm>
+            <a:off x="4892040" y="5440680"/>
+            <a:ext cx="5120640" cy="713232"/>
+          </a:xfrm>
+          <a:prstGeom prst="rect">
+            <a:avLst/>
+          </a:prstGeom>
+          <a:noFill/>
+          <a:ln/>
+        </p:spPr>
+        <p:txBody>
+          <a:bodyPr wrap="square" lIns="0" tIns="0" rIns="0" bIns="0" rtlCol="0" anchor="ctr"/>
+          <a:lstStyle/>
+          <a:p>
+            <a:pPr indent="0" marL="0">
+              <a:buNone/>
+            </a:pPr>
+            <a:r>
+              <a:rPr lang="en-US" sz="1250" dirty="0">
+                <a:solidFill>
+                  <a:srgbClr val="B8B8B8"/>
+                </a:solidFill>
+                <a:latin typeface="Poppins" pitchFamily="34" charset="0"/>
+                <a:ea typeface="Poppins" pitchFamily="34" charset="-122"/>
+                <a:cs typeface="Poppins" pitchFamily="34" charset="-120"/>
+              </a:rPr>
+              <a:t>Aperçus en direct : parallax, sections épinglées, révélations.</a:t>
+            </a:r>
+            <a:endParaRPr lang="en-US" sz="1250" dirty="0"/>
+          </a:p>
+        </p:txBody>
+      </p:sp>
+    </p:spTree>
+  </p:cSld>
+  <p:clrMapOvr>
+    <a:masterClrMapping/>
+  </p:clrMapOvr>
+</p:sld>
+</file>
+
+<file path=ppt/slides/slide13.xml><?xml version="1.0" encoding="utf-8"?>
+<p:sld xmlns:a="http://schemas.openxmlformats.org/drawingml/2006/main" xmlns:r="http://schemas.openxmlformats.org/officeDocument/2006/relationships" xmlns:p="http://schemas.openxmlformats.org/presentationml/2006/main">
+  <p:cSld name="Slide 13">
+    <p:bg>
+      <p:bgPr>
+        <a:solidFill>
+          <a:srgbClr val="0A0A0A"/>
+        </a:solidFill>
+      </p:bgPr>
+    </p:bg>
+    <p:spTree>
+      <p:nvGrpSpPr>
+        <p:cNvPr id="1" name=""/>
+        <p:cNvGrpSpPr/>
+        <p:nvPr/>
+      </p:nvGrpSpPr>
+      <p:grpSpPr>
+        <a:xfrm>
+          <a:off x="0" y="0"/>
+          <a:ext cx="0" cy="0"/>
+          <a:chOff x="0" y="0"/>
+          <a:chExt cx="0" cy="0"/>
+        </a:xfrm>
+      </p:grpSpPr>
+      <p:sp>
+        <p:nvSpPr>
+          <p:cNvPr id="2" name="Text 0"/>
+          <p:cNvSpPr/>
+          <p:nvPr/>
+        </p:nvSpPr>
+        <p:spPr>
+          <a:xfrm>
+            <a:off x="548640" y="384048"/>
+            <a:ext cx="10515600" cy="365760"/>
+          </a:xfrm>
+          <a:prstGeom prst="rect">
+            <a:avLst/>
+          </a:prstGeom>
+          <a:noFill/>
+          <a:ln/>
+        </p:spPr>
+        <p:txBody>
+          <a:bodyPr wrap="square" lIns="0" tIns="0" rIns="0" bIns="0" rtlCol="0" anchor="ctr"/>
+          <a:lstStyle/>
+          <a:p>
+            <a:pPr algn="l" indent="0" marL="0">
+              <a:buNone/>
+            </a:pPr>
+            <a:r>
+              <a:rPr lang="en-US" sz="1200" b="1" spc="300" kern="0" dirty="0">
+                <a:solidFill>
+                  <a:srgbClr val="FF2B47"/>
+                </a:solidFill>
+                <a:latin typeface="Poppins" pitchFamily="34" charset="0"/>
+                <a:ea typeface="Poppins" pitchFamily="34" charset="-122"/>
+                <a:cs typeface="Poppins" pitchFamily="34" charset="-120"/>
+              </a:rPr>
+              <a:t>WEB 5</a:t>
+            </a:r>
+            <a:pPr algn="l" indent="0" marL="0">
+              <a:buNone/>
+            </a:pPr>
+            <a:r>
+              <a:rPr lang="en-US" sz="1200" spc="300" kern="0" dirty="0">
+                <a:solidFill>
+                  <a:srgbClr val="6A6A6A"/>
+                </a:solidFill>
+                <a:latin typeface="Poppins" pitchFamily="34" charset="0"/>
+                <a:ea typeface="Poppins" pitchFamily="34" charset="-122"/>
+                <a:cs typeface="Poppins" pitchFamily="34" charset="-120"/>
+              </a:rPr>
+              <a:t>   ·   AUJOURD'HUI</a:t>
+            </a:r>
+            <a:endParaRPr lang="en-US" sz="1200" dirty="0"/>
+          </a:p>
+        </p:txBody>
+      </p:sp>
+      <p:sp>
+        <p:nvSpPr>
+          <p:cNvPr id="3" name="Text 1"/>
+          <p:cNvSpPr/>
+          <p:nvPr/>
+        </p:nvSpPr>
+        <p:spPr>
+          <a:xfrm>
+            <a:off x="10881360" y="6199632"/>
+            <a:ext cx="731520" cy="365760"/>
+          </a:xfrm>
+          <a:prstGeom prst="rect">
+            <a:avLst/>
+          </a:prstGeom>
+          <a:noFill/>
+          <a:ln/>
+        </p:spPr>
+        <p:txBody>
+          <a:bodyPr wrap="square" lIns="0" tIns="0" rIns="0" bIns="0" rtlCol="0" anchor="ctr"/>
+          <a:lstStyle/>
+          <a:p>
+            <a:pPr algn="r" indent="0" marL="0">
+              <a:buNone/>
+            </a:pPr>
+            <a:r>
+              <a:rPr lang="en-US" sz="1200" dirty="0">
+                <a:solidFill>
+                  <a:srgbClr val="6A6A6A"/>
+                </a:solidFill>
+                <a:latin typeface="Poppins" pitchFamily="34" charset="0"/>
+                <a:ea typeface="Poppins" pitchFamily="34" charset="-122"/>
+                <a:cs typeface="Poppins" pitchFamily="34" charset="-120"/>
+              </a:rPr>
+              <a:t>13</a:t>
+            </a:r>
+            <a:endParaRPr lang="en-US" sz="1200" dirty="0"/>
+          </a:p>
+        </p:txBody>
+      </p:sp>
+      <p:sp>
+        <p:nvSpPr>
+          <p:cNvPr id="4" name="Text 2"/>
+          <p:cNvSpPr/>
+          <p:nvPr/>
+        </p:nvSpPr>
+        <p:spPr>
+          <a:xfrm>
+            <a:off x="548640" y="914400"/>
+            <a:ext cx="10972800" cy="731520"/>
+          </a:xfrm>
+          <a:prstGeom prst="rect">
+            <a:avLst/>
+          </a:prstGeom>
+          <a:noFill/>
+          <a:ln/>
+        </p:spPr>
+        <p:txBody>
+          <a:bodyPr wrap="square" lIns="0" tIns="0" rIns="0" bIns="0" rtlCol="0" anchor="ctr"/>
+          <a:lstStyle/>
+          <a:p>
+            <a:pPr indent="0" marL="0">
+              <a:buNone/>
+            </a:pPr>
+            <a:r>
+              <a:rPr lang="en-US" sz="3200" b="1" dirty="0">
+                <a:solidFill>
+                  <a:srgbClr val="FFFFFF"/>
+                </a:solidFill>
+                <a:latin typeface="Poppins" pitchFamily="34" charset="0"/>
+                <a:ea typeface="Poppins" pitchFamily="34" charset="-122"/>
+                <a:cs typeface="Poppins" pitchFamily="34" charset="-120"/>
+              </a:rPr>
+              <a:t>À vous de raffiner</a:t>
+            </a:r>
+            <a:endParaRPr lang="en-US" sz="3200" dirty="0"/>
+          </a:p>
+        </p:txBody>
+      </p:sp>
+      <p:sp>
+        <p:nvSpPr>
+          <p:cNvPr id="5" name="Shape 3"/>
+          <p:cNvSpPr/>
+          <p:nvPr/>
+        </p:nvSpPr>
+        <p:spPr>
+          <a:xfrm>
+            <a:off x="548640" y="1874520"/>
+            <a:ext cx="11064240" cy="804672"/>
+          </a:xfrm>
+          <a:prstGeom prst="roundRect">
+            <a:avLst>
+              <a:gd name="adj" fmla="val 7955"/>
+            </a:avLst>
+          </a:prstGeom>
+          <a:solidFill>
+            <a:srgbClr val="161616"/>
+          </a:solidFill>
+          <a:ln/>
+        </p:spPr>
+      </p:sp>
+      <p:sp>
+        <p:nvSpPr>
+          <p:cNvPr id="6" name="Text 4"/>
+          <p:cNvSpPr/>
+          <p:nvPr/>
+        </p:nvSpPr>
+        <p:spPr>
+          <a:xfrm>
+            <a:off x="868680" y="1965960"/>
+            <a:ext cx="2194560" cy="621792"/>
+          </a:xfrm>
+          <a:prstGeom prst="rect">
+            <a:avLst/>
+          </a:prstGeom>
+          <a:noFill/>
+          <a:ln/>
+        </p:spPr>
+        <p:txBody>
+          <a:bodyPr wrap="square" lIns="0" tIns="0" rIns="0" bIns="0" rtlCol="0" anchor="ctr"/>
+          <a:lstStyle/>
+          <a:p>
+            <a:pPr indent="0" marL="0">
+              <a:buNone/>
+            </a:pPr>
+            <a:r>
+              <a:rPr lang="en-US" sz="1700" b="1" dirty="0">
+                <a:solidFill>
+                  <a:srgbClr val="FF2B47"/>
+                </a:solidFill>
+                <a:latin typeface="Poppins" pitchFamily="34" charset="0"/>
+                <a:ea typeface="Poppins" pitchFamily="34" charset="-122"/>
+                <a:cs typeface="Poppins" pitchFamily="34" charset="-120"/>
+              </a:rPr>
+              <a:t>Raffiner</a:t>
+            </a:r>
+            <a:endParaRPr lang="en-US" sz="1700" dirty="0"/>
+          </a:p>
+        </p:txBody>
+      </p:sp>
+      <p:sp>
+        <p:nvSpPr>
+          <p:cNvPr id="7" name="Text 5"/>
+          <p:cNvSpPr/>
+          <p:nvPr/>
+        </p:nvSpPr>
+        <p:spPr>
+          <a:xfrm>
+            <a:off x="3200400" y="1965960"/>
+            <a:ext cx="8138160" cy="621792"/>
+          </a:xfrm>
+          <a:prstGeom prst="rect">
+            <a:avLst/>
+          </a:prstGeom>
+          <a:noFill/>
+          <a:ln/>
+        </p:spPr>
+        <p:txBody>
+          <a:bodyPr wrap="square" lIns="0" tIns="0" rIns="0" bIns="0" rtlCol="0" anchor="ctr"/>
+          <a:lstStyle/>
+          <a:p>
+            <a:pPr indent="0" marL="0">
+              <a:buNone/>
+            </a:pPr>
+            <a:r>
+              <a:rPr lang="en-US" sz="1400" dirty="0">
+                <a:solidFill>
+                  <a:srgbClr val="B8B8B8"/>
+                </a:solidFill>
+                <a:latin typeface="Poppins" pitchFamily="34" charset="0"/>
+                <a:ea typeface="Poppins" pitchFamily="34" charset="-122"/>
+                <a:cs typeface="Poppins" pitchFamily="34" charset="-120"/>
+              </a:rPr>
+              <a:t>maquettes mobile et desktop, à partir de vos directions retenues</a:t>
+            </a:r>
+            <a:endParaRPr lang="en-US" sz="1400" dirty="0"/>
+          </a:p>
+        </p:txBody>
+      </p:sp>
+      <p:sp>
+        <p:nvSpPr>
+          <p:cNvPr id="8" name="Shape 6"/>
+          <p:cNvSpPr/>
+          <p:nvPr/>
+        </p:nvSpPr>
+        <p:spPr>
+          <a:xfrm>
+            <a:off x="548640" y="2807208"/>
+            <a:ext cx="11064240" cy="804672"/>
+          </a:xfrm>
+          <a:prstGeom prst="roundRect">
+            <a:avLst>
+              <a:gd name="adj" fmla="val 7955"/>
+            </a:avLst>
+          </a:prstGeom>
+          <a:solidFill>
+            <a:srgbClr val="161616"/>
+          </a:solidFill>
+          <a:ln/>
+        </p:spPr>
+      </p:sp>
+      <p:sp>
+        <p:nvSpPr>
+          <p:cNvPr id="9" name="Text 7"/>
+          <p:cNvSpPr/>
+          <p:nvPr/>
+        </p:nvSpPr>
+        <p:spPr>
+          <a:xfrm>
+            <a:off x="868680" y="2898648"/>
+            <a:ext cx="2194560" cy="621792"/>
+          </a:xfrm>
+          <a:prstGeom prst="rect">
+            <a:avLst/>
+          </a:prstGeom>
+          <a:noFill/>
+          <a:ln/>
+        </p:spPr>
+        <p:txBody>
+          <a:bodyPr wrap="square" lIns="0" tIns="0" rIns="0" bIns="0" rtlCol="0" anchor="ctr"/>
+          <a:lstStyle/>
+          <a:p>
+            <a:pPr indent="0" marL="0">
+              <a:buNone/>
+            </a:pPr>
+            <a:r>
+              <a:rPr lang="en-US" sz="1700" b="1" dirty="0">
+                <a:solidFill>
+                  <a:srgbClr val="FF2B47"/>
+                </a:solidFill>
+                <a:latin typeface="Poppins" pitchFamily="34" charset="0"/>
+                <a:ea typeface="Poppins" pitchFamily="34" charset="-122"/>
+                <a:cs typeface="Poppins" pitchFamily="34" charset="-120"/>
+              </a:rPr>
+              <a:t>Filtrer</a:t>
+            </a:r>
+            <a:endParaRPr lang="en-US" sz="1700" dirty="0"/>
+          </a:p>
+        </p:txBody>
+      </p:sp>
+      <p:sp>
+        <p:nvSpPr>
+          <p:cNvPr id="10" name="Text 8"/>
+          <p:cNvSpPr/>
+          <p:nvPr/>
+        </p:nvSpPr>
+        <p:spPr>
+          <a:xfrm>
+            <a:off x="3200400" y="2898648"/>
+            <a:ext cx="8138160" cy="621792"/>
+          </a:xfrm>
+          <a:prstGeom prst="rect">
+            <a:avLst/>
+          </a:prstGeom>
+          <a:noFill/>
+          <a:ln/>
+        </p:spPr>
+        <p:txBody>
+          <a:bodyPr wrap="square" lIns="0" tIns="0" rIns="0" bIns="0" rtlCol="0" anchor="ctr"/>
+          <a:lstStyle/>
+          <a:p>
+            <a:pPr indent="0" marL="0">
+              <a:buNone/>
+            </a:pPr>
+            <a:r>
+              <a:rPr lang="en-US" sz="1400" dirty="0">
+                <a:solidFill>
+                  <a:srgbClr val="B8B8B8"/>
+                </a:solidFill>
+                <a:latin typeface="Poppins" pitchFamily="34" charset="0"/>
+                <a:ea typeface="Poppins" pitchFamily="34" charset="-122"/>
+                <a:cs typeface="Poppins" pitchFamily="34" charset="-120"/>
+              </a:rPr>
+              <a:t>persona, accessibilité, et maintenant : justifiable et distinctif</a:t>
+            </a:r>
+            <a:endParaRPr lang="en-US" sz="1400" dirty="0"/>
+          </a:p>
+        </p:txBody>
+      </p:sp>
+      <p:sp>
+        <p:nvSpPr>
+          <p:cNvPr id="11" name="Shape 9"/>
+          <p:cNvSpPr/>
+          <p:nvPr/>
+        </p:nvSpPr>
+        <p:spPr>
+          <a:xfrm>
+            <a:off x="548640" y="3739896"/>
+            <a:ext cx="11064240" cy="804672"/>
+          </a:xfrm>
+          <a:prstGeom prst="roundRect">
+            <a:avLst>
+              <a:gd name="adj" fmla="val 7955"/>
+            </a:avLst>
+          </a:prstGeom>
+          <a:solidFill>
+            <a:srgbClr val="161616"/>
+          </a:solidFill>
+          <a:ln/>
+        </p:spPr>
+      </p:sp>
+      <p:sp>
+        <p:nvSpPr>
+          <p:cNvPr id="12" name="Text 10"/>
+          <p:cNvSpPr/>
+          <p:nvPr/>
+        </p:nvSpPr>
+        <p:spPr>
+          <a:xfrm>
+            <a:off x="868680" y="3831336"/>
+            <a:ext cx="2194560" cy="621792"/>
+          </a:xfrm>
+          <a:prstGeom prst="rect">
+            <a:avLst/>
+          </a:prstGeom>
+          <a:noFill/>
+          <a:ln/>
+        </p:spPr>
+        <p:txBody>
+          <a:bodyPr wrap="square" lIns="0" tIns="0" rIns="0" bIns="0" rtlCol="0" anchor="ctr"/>
+          <a:lstStyle/>
+          <a:p>
+            <a:pPr indent="0" marL="0">
+              <a:buNone/>
+            </a:pPr>
+            <a:r>
+              <a:rPr lang="en-US" sz="1700" b="1" dirty="0">
+                <a:solidFill>
+                  <a:srgbClr val="FF2B47"/>
+                </a:solidFill>
+                <a:latin typeface="Poppins" pitchFamily="34" charset="0"/>
+                <a:ea typeface="Poppins" pitchFamily="34" charset="-122"/>
+                <a:cs typeface="Poppins" pitchFamily="34" charset="-120"/>
+              </a:rPr>
+              <a:t>Assister</a:t>
+            </a:r>
+            <a:endParaRPr lang="en-US" sz="1700" dirty="0"/>
+          </a:p>
+        </p:txBody>
+      </p:sp>
+      <p:sp>
+        <p:nvSpPr>
+          <p:cNvPr id="13" name="Text 11"/>
+          <p:cNvSpPr/>
+          <p:nvPr/>
+        </p:nvSpPr>
+        <p:spPr>
+          <a:xfrm>
+            <a:off x="3200400" y="3831336"/>
+            <a:ext cx="8138160" cy="621792"/>
+          </a:xfrm>
+          <a:prstGeom prst="rect">
+            <a:avLst/>
+          </a:prstGeom>
+          <a:noFill/>
+          <a:ln/>
+        </p:spPr>
+        <p:txBody>
+          <a:bodyPr wrap="square" lIns="0" tIns="0" rIns="0" bIns="0" rtlCol="0" anchor="ctr"/>
+          <a:lstStyle/>
+          <a:p>
+            <a:pPr indent="0" marL="0">
+              <a:buNone/>
+            </a:pPr>
+            <a:r>
+              <a:rPr lang="en-US" sz="1400" dirty="0">
+                <a:solidFill>
+                  <a:srgbClr val="B8B8B8"/>
+                </a:solidFill>
+                <a:latin typeface="Poppins" pitchFamily="34" charset="0"/>
+                <a:ea typeface="Poppins" pitchFamily="34" charset="-122"/>
+                <a:cs typeface="Poppins" pitchFamily="34" charset="-120"/>
+              </a:rPr>
+              <a:t>auto-layout, contenu, images, vectorisation (assistants IA gratuits de Figma)</a:t>
+            </a:r>
+            <a:endParaRPr lang="en-US" sz="1400" dirty="0"/>
+          </a:p>
+        </p:txBody>
+      </p:sp>
+      <p:sp>
+        <p:nvSpPr>
+          <p:cNvPr id="14" name="Shape 12"/>
+          <p:cNvSpPr/>
+          <p:nvPr/>
+        </p:nvSpPr>
+        <p:spPr>
+          <a:xfrm>
+            <a:off x="548640" y="4672584"/>
+            <a:ext cx="11064240" cy="804672"/>
+          </a:xfrm>
+          <a:prstGeom prst="roundRect">
+            <a:avLst>
+              <a:gd name="adj" fmla="val 7955"/>
+            </a:avLst>
+          </a:prstGeom>
+          <a:solidFill>
+            <a:srgbClr val="161616"/>
+          </a:solidFill>
+          <a:ln/>
+        </p:spPr>
+      </p:sp>
+      <p:sp>
+        <p:nvSpPr>
+          <p:cNvPr id="15" name="Text 13"/>
+          <p:cNvSpPr/>
+          <p:nvPr/>
+        </p:nvSpPr>
+        <p:spPr>
+          <a:xfrm>
+            <a:off x="868680" y="4764024"/>
+            <a:ext cx="2194560" cy="621792"/>
+          </a:xfrm>
+          <a:prstGeom prst="rect">
+            <a:avLst/>
+          </a:prstGeom>
+          <a:noFill/>
+          <a:ln/>
+        </p:spPr>
+        <p:txBody>
+          <a:bodyPr wrap="square" lIns="0" tIns="0" rIns="0" bIns="0" rtlCol="0" anchor="ctr"/>
+          <a:lstStyle/>
+          <a:p>
+            <a:pPr indent="0" marL="0">
+              <a:buNone/>
+            </a:pPr>
+            <a:r>
+              <a:rPr lang="en-US" sz="1700" b="1" dirty="0">
+                <a:solidFill>
+                  <a:srgbClr val="FF2B47"/>
+                </a:solidFill>
+                <a:latin typeface="Poppins" pitchFamily="34" charset="0"/>
+                <a:ea typeface="Poppins" pitchFamily="34" charset="-122"/>
+                <a:cs typeface="Poppins" pitchFamily="34" charset="-120"/>
+              </a:rPr>
+              <a:t>Anticiper</a:t>
+            </a:r>
+            <a:endParaRPr lang="en-US" sz="1700" dirty="0"/>
+          </a:p>
+        </p:txBody>
+      </p:sp>
+      <p:sp>
+        <p:nvSpPr>
+          <p:cNvPr id="16" name="Text 14"/>
+          <p:cNvSpPr/>
+          <p:nvPr/>
+        </p:nvSpPr>
+        <p:spPr>
+          <a:xfrm>
+            <a:off x="3200400" y="4764024"/>
+            <a:ext cx="8138160" cy="621792"/>
+          </a:xfrm>
+          <a:prstGeom prst="rect">
+            <a:avLst/>
+          </a:prstGeom>
+          <a:noFill/>
+          <a:ln/>
+        </p:spPr>
+        <p:txBody>
+          <a:bodyPr wrap="square" lIns="0" tIns="0" rIns="0" bIns="0" rtlCol="0" anchor="ctr"/>
+          <a:lstStyle/>
+          <a:p>
+            <a:pPr indent="0" marL="0">
+              <a:buNone/>
+            </a:pPr>
+            <a:r>
+              <a:rPr lang="en-US" sz="1400" dirty="0">
+                <a:solidFill>
+                  <a:srgbClr val="B8B8B8"/>
+                </a:solidFill>
+                <a:latin typeface="Poppins" pitchFamily="34" charset="0"/>
+                <a:ea typeface="Poppins" pitchFamily="34" charset="-122"/>
+                <a:cs typeface="Poppins" pitchFamily="34" charset="-120"/>
+              </a:rPr>
+              <a:t>les animations au scroll et interactions, sans les prototyper</a:t>
+            </a:r>
+            <a:endParaRPr lang="en-US" sz="1400" dirty="0"/>
+          </a:p>
+        </p:txBody>
+      </p:sp>
+      <p:sp>
+        <p:nvSpPr>
+          <p:cNvPr id="17" name="Shape 15"/>
+          <p:cNvSpPr/>
+          <p:nvPr/>
+        </p:nvSpPr>
+        <p:spPr>
+          <a:xfrm>
+            <a:off x="548640" y="5605272"/>
+            <a:ext cx="11064240" cy="804672"/>
+          </a:xfrm>
+          <a:prstGeom prst="roundRect">
+            <a:avLst>
+              <a:gd name="adj" fmla="val 7955"/>
+            </a:avLst>
+          </a:prstGeom>
+          <a:solidFill>
+            <a:srgbClr val="161616"/>
+          </a:solidFill>
+          <a:ln/>
+        </p:spPr>
+      </p:sp>
+      <p:sp>
+        <p:nvSpPr>
+          <p:cNvPr id="18" name="Text 16"/>
+          <p:cNvSpPr/>
+          <p:nvPr/>
+        </p:nvSpPr>
+        <p:spPr>
+          <a:xfrm>
+            <a:off x="868680" y="5696712"/>
+            <a:ext cx="2194560" cy="621792"/>
+          </a:xfrm>
+          <a:prstGeom prst="rect">
+            <a:avLst/>
+          </a:prstGeom>
+          <a:noFill/>
+          <a:ln/>
+        </p:spPr>
+        <p:txBody>
+          <a:bodyPr wrap="square" lIns="0" tIns="0" rIns="0" bIns="0" rtlCol="0" anchor="ctr"/>
+          <a:lstStyle/>
+          <a:p>
+            <a:pPr indent="0" marL="0">
+              <a:buNone/>
+            </a:pPr>
+            <a:r>
+              <a:rPr lang="en-US" sz="1700" b="1" dirty="0">
+                <a:solidFill>
+                  <a:srgbClr val="FF2B47"/>
+                </a:solidFill>
+                <a:latin typeface="Poppins" pitchFamily="34" charset="0"/>
+                <a:ea typeface="Poppins" pitchFamily="34" charset="-122"/>
+                <a:cs typeface="Poppins" pitchFamily="34" charset="-120"/>
+              </a:rPr>
+              <a:t>Documenter</a:t>
+            </a:r>
+            <a:endParaRPr lang="en-US" sz="1700" dirty="0"/>
+          </a:p>
+        </p:txBody>
+      </p:sp>
+      <p:sp>
+        <p:nvSpPr>
+          <p:cNvPr id="19" name="Text 17"/>
+          <p:cNvSpPr/>
+          <p:nvPr/>
+        </p:nvSpPr>
+        <p:spPr>
+          <a:xfrm>
+            <a:off x="3200400" y="5696712"/>
+            <a:ext cx="8138160" cy="621792"/>
+          </a:xfrm>
+          <a:prstGeom prst="rect">
+            <a:avLst/>
+          </a:prstGeom>
+          <a:noFill/>
+          <a:ln/>
+        </p:spPr>
+        <p:txBody>
+          <a:bodyPr wrap="square" lIns="0" tIns="0" rIns="0" bIns="0" rtlCol="0" anchor="ctr"/>
+          <a:lstStyle/>
+          <a:p>
+            <a:pPr indent="0" marL="0">
+              <a:buNone/>
+            </a:pPr>
+            <a:r>
+              <a:rPr lang="en-US" sz="1400" dirty="0">
+                <a:solidFill>
+                  <a:srgbClr val="B8B8B8"/>
+                </a:solidFill>
+                <a:latin typeface="Poppins" pitchFamily="34" charset="0"/>
+                <a:ea typeface="Poppins" pitchFamily="34" charset="-122"/>
+                <a:cs typeface="Poppins" pitchFamily="34" charset="-120"/>
+              </a:rPr>
+              <a:t>chaque changement substantiel dans JOURNAL.md</a:t>
+            </a:r>
+            <a:endParaRPr lang="en-US" sz="1400" dirty="0"/>
+          </a:p>
+        </p:txBody>
+      </p:sp>
+    </p:spTree>
+  </p:cSld>
+  <p:clrMapOvr>
+    <a:masterClrMapping/>
+  </p:clrMapOvr>
+</p:sld>
+</file>
+
+<file path=ppt/slides/slide14.xml><?xml version="1.0" encoding="utf-8"?>
+<p:sld xmlns:a="http://schemas.openxmlformats.org/drawingml/2006/main" xmlns:r="http://schemas.openxmlformats.org/officeDocument/2006/relationships" xmlns:p="http://schemas.openxmlformats.org/presentationml/2006/main">
+  <p:cSld name="Slide 14">
+    <p:bg>
+      <p:bgPr>
+        <a:solidFill>
+          <a:srgbClr val="0A0A0A"/>
+        </a:solidFill>
+      </p:bgPr>
+    </p:bg>
+    <p:spTree>
+      <p:nvGrpSpPr>
+        <p:cNvPr id="1" name=""/>
+        <p:cNvGrpSpPr/>
+        <p:nvPr/>
+      </p:nvGrpSpPr>
+      <p:grpSpPr>
+        <a:xfrm>
+          <a:off x="0" y="0"/>
+          <a:ext cx="0" cy="0"/>
+          <a:chOff x="0" y="0"/>
+          <a:chExt cx="0" cy="0"/>
+        </a:xfrm>
+      </p:grpSpPr>
+      <p:sp>
+        <p:nvSpPr>
+          <p:cNvPr id="2" name="Text 0"/>
+          <p:cNvSpPr/>
+          <p:nvPr/>
+        </p:nvSpPr>
+        <p:spPr>
+          <a:xfrm>
+            <a:off x="548640" y="384048"/>
+            <a:ext cx="10515600" cy="365760"/>
+          </a:xfrm>
+          <a:prstGeom prst="rect">
+            <a:avLst/>
+          </a:prstGeom>
+          <a:noFill/>
+          <a:ln/>
+        </p:spPr>
+        <p:txBody>
+          <a:bodyPr wrap="square" lIns="0" tIns="0" rIns="0" bIns="0" rtlCol="0" anchor="ctr"/>
+          <a:lstStyle/>
+          <a:p>
+            <a:pPr algn="l" indent="0" marL="0">
+              <a:buNone/>
+            </a:pPr>
+            <a:r>
+              <a:rPr lang="en-US" sz="1200" b="1" spc="300" kern="0" dirty="0">
+                <a:solidFill>
+                  <a:srgbClr val="FF2B47"/>
+                </a:solidFill>
+                <a:latin typeface="Poppins" pitchFamily="34" charset="0"/>
+                <a:ea typeface="Poppins" pitchFamily="34" charset="-122"/>
+                <a:cs typeface="Poppins" pitchFamily="34" charset="-120"/>
+              </a:rPr>
+              <a:t>WEB 5</a:t>
+            </a:r>
+            <a:pPr algn="l" indent="0" marL="0">
+              <a:buNone/>
+            </a:pPr>
+            <a:r>
+              <a:rPr lang="en-US" sz="1200" spc="300" kern="0" dirty="0">
+                <a:solidFill>
+                  <a:srgbClr val="6A6A6A"/>
+                </a:solidFill>
+                <a:latin typeface="Poppins" pitchFamily="34" charset="0"/>
+                <a:ea typeface="Poppins" pitchFamily="34" charset="-122"/>
+                <a:cs typeface="Poppins" pitchFamily="34" charset="-120"/>
+              </a:rPr>
+              <a:t>   ·   EN ATELIER</a:t>
+            </a:r>
+            <a:endParaRPr lang="en-US" sz="1200" dirty="0"/>
+          </a:p>
+        </p:txBody>
+      </p:sp>
+      <p:sp>
+        <p:nvSpPr>
+          <p:cNvPr id="3" name="Text 1"/>
+          <p:cNvSpPr/>
+          <p:nvPr/>
+        </p:nvSpPr>
+        <p:spPr>
+          <a:xfrm>
+            <a:off x="10881360" y="6199632"/>
+            <a:ext cx="731520" cy="365760"/>
+          </a:xfrm>
+          <a:prstGeom prst="rect">
+            <a:avLst/>
+          </a:prstGeom>
+          <a:noFill/>
+          <a:ln/>
+        </p:spPr>
+        <p:txBody>
+          <a:bodyPr wrap="square" lIns="0" tIns="0" rIns="0" bIns="0" rtlCol="0" anchor="ctr"/>
+          <a:lstStyle/>
+          <a:p>
+            <a:pPr algn="r" indent="0" marL="0">
+              <a:buNone/>
+            </a:pPr>
+            <a:r>
+              <a:rPr lang="en-US" sz="1200" dirty="0">
+                <a:solidFill>
+                  <a:srgbClr val="6A6A6A"/>
+                </a:solidFill>
+                <a:latin typeface="Poppins" pitchFamily="34" charset="0"/>
+                <a:ea typeface="Poppins" pitchFamily="34" charset="-122"/>
+                <a:cs typeface="Poppins" pitchFamily="34" charset="-120"/>
+              </a:rPr>
+              <a:t>14</a:t>
             </a:r>
             <a:endParaRPr lang="en-US" sz="1200" dirty="0"/>
           </a:p>
@@ -4449,7 +7101,7 @@
                 <a:ea typeface="Poppins" pitchFamily="34" charset="-122"/>
                 <a:cs typeface="Poppins" pitchFamily="34" charset="-120"/>
               </a:rPr>
-              <a:t>07</a:t>
+              <a:t>06</a:t>
             </a:r>
             <a:endParaRPr lang="en-US" sz="1200" dirty="0"/>
           </a:p>
@@ -5063,7 +7715,7 @@
                 <a:ea typeface="Poppins" pitchFamily="34" charset="-122"/>
                 <a:cs typeface="Poppins" pitchFamily="34" charset="-120"/>
               </a:rPr>
-              <a:t>06</a:t>
+              <a:t>07</a:t>
             </a:r>
             <a:endParaRPr lang="en-US" sz="1200" dirty="0"/>
           </a:p>
